--- a/PPTs/Ch11_Interrupt_Timer_PWM Exercises ANS.pptx
+++ b/PPTs/Ch11_Interrupt_Timer_PWM Exercises ANS.pptx
@@ -6,10 +6,10 @@
     <p:sldMasterId id="2147483698" r:id="rId2"/>
   </p:sldMasterIdLst>
   <p:notesMasterIdLst>
-    <p:notesMasterId r:id="rId8"/>
+    <p:notesMasterId r:id="rId9"/>
   </p:notesMasterIdLst>
   <p:handoutMasterIdLst>
-    <p:handoutMasterId r:id="rId9"/>
+    <p:handoutMasterId r:id="rId10"/>
   </p:handoutMasterIdLst>
   <p:sldIdLst>
     <p:sldId id="256" r:id="rId3"/>
@@ -17,6 +17,7 @@
     <p:sldId id="317" r:id="rId5"/>
     <p:sldId id="314" r:id="rId6"/>
     <p:sldId id="315" r:id="rId7"/>
+    <p:sldId id="318" r:id="rId8"/>
   </p:sldIdLst>
   <p:sldSz cx="9144000" cy="6858000" type="screen4x3"/>
   <p:notesSz cx="7023100" cy="9309100"/>
@@ -137,7 +138,7 @@
 <file path=ppt/revisionInfo.xml><?xml version="1.0" encoding="utf-8"?>
 <p1510:revInfo xmlns:a="http://schemas.openxmlformats.org/drawingml/2006/main" xmlns:r="http://schemas.openxmlformats.org/officeDocument/2006/relationships" xmlns:p1510="http://schemas.microsoft.com/office/powerpoint/2015/10/main">
   <p1510:revLst>
-    <p1510:client id="{FE005790-576D-450D-9301-7DB63049DAAC}" v="13" dt="2025-10-14T21:45:16.740"/>
+    <p1510:client id="{FE005790-576D-450D-9301-7DB63049DAAC}" v="14" dt="2025-10-21T21:45:12.047"/>
   </p1510:revLst>
 </p1510:revInfo>
 </file>
@@ -147,7 +148,7 @@
   <pc:docChgLst>
     <pc:chgData name="Zonghua Gu" userId="9a7e1853e1951ef5" providerId="LiveId" clId="{CF1FAA12-072C-4ED5-BA76-0FFFAEFDB88A}"/>
     <pc:docChg chg="undo redo custSel addSld delSld modSld sldOrd delMainMaster">
-      <pc:chgData name="Zonghua Gu" userId="9a7e1853e1951ef5" providerId="LiveId" clId="{CF1FAA12-072C-4ED5-BA76-0FFFAEFDB88A}" dt="2025-10-14T21:48:38.168" v="912" actId="14100"/>
+      <pc:chgData name="Zonghua Gu" userId="9a7e1853e1951ef5" providerId="LiveId" clId="{CF1FAA12-072C-4ED5-BA76-0FFFAEFDB88A}" dt="2025-10-21T21:45:06.437" v="914" actId="22"/>
       <pc:docMkLst>
         <pc:docMk/>
       </pc:docMkLst>
@@ -181,132 +182,6 @@
             <ac:spMk id="13" creationId="{273EC5B2-C191-2980-14D0-C87219AED9C5}"/>
           </ac:spMkLst>
         </pc:spChg>
-      </pc:sldChg>
-      <pc:sldChg chg="add del">
-        <pc:chgData name="Zonghua Gu" userId="9a7e1853e1951ef5" providerId="LiveId" clId="{CF1FAA12-072C-4ED5-BA76-0FFFAEFDB88A}" dt="2025-09-28T20:34:57.062" v="444" actId="47"/>
-        <pc:sldMkLst>
-          <pc:docMk/>
-          <pc:sldMk cId="3989690828" sldId="260"/>
-        </pc:sldMkLst>
-      </pc:sldChg>
-      <pc:sldChg chg="addSp modSp add del mod">
-        <pc:chgData name="Zonghua Gu" userId="9a7e1853e1951ef5" providerId="LiveId" clId="{CF1FAA12-072C-4ED5-BA76-0FFFAEFDB88A}" dt="2025-09-28T20:19:47.197" v="328" actId="20577"/>
-        <pc:sldMkLst>
-          <pc:docMk/>
-          <pc:sldMk cId="2803075552" sldId="279"/>
-        </pc:sldMkLst>
-      </pc:sldChg>
-      <pc:sldChg chg="modSp mod">
-        <pc:chgData name="Zonghua Gu" userId="9a7e1853e1951ef5" providerId="LiveId" clId="{CF1FAA12-072C-4ED5-BA76-0FFFAEFDB88A}" dt="2025-09-22T21:40:42.491" v="28" actId="14100"/>
-        <pc:sldMkLst>
-          <pc:docMk/>
-          <pc:sldMk cId="3018883392" sldId="282"/>
-        </pc:sldMkLst>
-      </pc:sldChg>
-      <pc:sldChg chg="addSp delSp modSp mod">
-        <pc:chgData name="Zonghua Gu" userId="9a7e1853e1951ef5" providerId="LiveId" clId="{CF1FAA12-072C-4ED5-BA76-0FFFAEFDB88A}" dt="2025-09-28T20:37:59.424" v="449" actId="20577"/>
-        <pc:sldMkLst>
-          <pc:docMk/>
-          <pc:sldMk cId="4015673518" sldId="283"/>
-        </pc:sldMkLst>
-      </pc:sldChg>
-      <pc:sldChg chg="addSp delSp modSp mod">
-        <pc:chgData name="Zonghua Gu" userId="9a7e1853e1951ef5" providerId="LiveId" clId="{CF1FAA12-072C-4ED5-BA76-0FFFAEFDB88A}" dt="2025-09-28T20:04:27.528" v="237" actId="1036"/>
-        <pc:sldMkLst>
-          <pc:docMk/>
-          <pc:sldMk cId="17129334" sldId="284"/>
-        </pc:sldMkLst>
-      </pc:sldChg>
-      <pc:sldChg chg="addSp delSp modSp mod">
-        <pc:chgData name="Zonghua Gu" userId="9a7e1853e1951ef5" providerId="LiveId" clId="{CF1FAA12-072C-4ED5-BA76-0FFFAEFDB88A}" dt="2025-09-28T20:05:44.935" v="245" actId="478"/>
-        <pc:sldMkLst>
-          <pc:docMk/>
-          <pc:sldMk cId="1891761629" sldId="285"/>
-        </pc:sldMkLst>
-      </pc:sldChg>
-      <pc:sldChg chg="addSp delSp modSp mod delAnim modAnim">
-        <pc:chgData name="Zonghua Gu" userId="9a7e1853e1951ef5" providerId="LiveId" clId="{CF1FAA12-072C-4ED5-BA76-0FFFAEFDB88A}" dt="2025-09-28T20:39:31.147" v="466" actId="20577"/>
-        <pc:sldMkLst>
-          <pc:docMk/>
-          <pc:sldMk cId="2029335128" sldId="286"/>
-        </pc:sldMkLst>
-      </pc:sldChg>
-      <pc:sldChg chg="addSp delSp modSp mod modAnim">
-        <pc:chgData name="Zonghua Gu" userId="9a7e1853e1951ef5" providerId="LiveId" clId="{CF1FAA12-072C-4ED5-BA76-0FFFAEFDB88A}" dt="2025-09-28T20:39:24.954" v="463" actId="14100"/>
-        <pc:sldMkLst>
-          <pc:docMk/>
-          <pc:sldMk cId="2553664942" sldId="287"/>
-        </pc:sldMkLst>
-      </pc:sldChg>
-      <pc:sldChg chg="add">
-        <pc:chgData name="Zonghua Gu" userId="9a7e1853e1951ef5" providerId="LiveId" clId="{CF1FAA12-072C-4ED5-BA76-0FFFAEFDB88A}" dt="2025-09-28T20:50:12.637" v="547"/>
-        <pc:sldMkLst>
-          <pc:docMk/>
-          <pc:sldMk cId="1230673309" sldId="293"/>
-        </pc:sldMkLst>
-      </pc:sldChg>
-      <pc:sldChg chg="addSp delSp modSp add mod modNotesTx">
-        <pc:chgData name="Zonghua Gu" userId="9a7e1853e1951ef5" providerId="LiveId" clId="{CF1FAA12-072C-4ED5-BA76-0FFFAEFDB88A}" dt="2025-09-28T20:33:33.175" v="429" actId="27636"/>
-        <pc:sldMkLst>
-          <pc:docMk/>
-          <pc:sldMk cId="2002481813" sldId="294"/>
-        </pc:sldMkLst>
-      </pc:sldChg>
-      <pc:sldChg chg="addSp modSp mod">
-        <pc:chgData name="Zonghua Gu" userId="9a7e1853e1951ef5" providerId="LiveId" clId="{CF1FAA12-072C-4ED5-BA76-0FFFAEFDB88A}" dt="2025-10-06T13:02:28.141" v="786" actId="20577"/>
-        <pc:sldMkLst>
-          <pc:docMk/>
-          <pc:sldMk cId="1739833041" sldId="300"/>
-        </pc:sldMkLst>
-      </pc:sldChg>
-      <pc:sldChg chg="modSp mod">
-        <pc:chgData name="Zonghua Gu" userId="9a7e1853e1951ef5" providerId="LiveId" clId="{CF1FAA12-072C-4ED5-BA76-0FFFAEFDB88A}" dt="2025-09-22T23:36:28.039" v="40" actId="20577"/>
-        <pc:sldMkLst>
-          <pc:docMk/>
-          <pc:sldMk cId="4252816745" sldId="301"/>
-        </pc:sldMkLst>
-      </pc:sldChg>
-      <pc:sldChg chg="addSp delSp modSp mod">
-        <pc:chgData name="Zonghua Gu" userId="9a7e1853e1951ef5" providerId="LiveId" clId="{CF1FAA12-072C-4ED5-BA76-0FFFAEFDB88A}" dt="2025-10-07T21:31:05.903" v="797" actId="20577"/>
-        <pc:sldMkLst>
-          <pc:docMk/>
-          <pc:sldMk cId="1476999915" sldId="308"/>
-        </pc:sldMkLst>
-      </pc:sldChg>
-      <pc:sldChg chg="addSp modSp mod ord">
-        <pc:chgData name="Zonghua Gu" userId="9a7e1853e1951ef5" providerId="LiveId" clId="{CF1FAA12-072C-4ED5-BA76-0FFFAEFDB88A}" dt="2025-10-07T21:32:27.659" v="803" actId="1076"/>
-        <pc:sldMkLst>
-          <pc:docMk/>
-          <pc:sldMk cId="1907313311" sldId="309"/>
-        </pc:sldMkLst>
-      </pc:sldChg>
-      <pc:sldChg chg="del">
-        <pc:chgData name="Zonghua Gu" userId="9a7e1853e1951ef5" providerId="LiveId" clId="{CF1FAA12-072C-4ED5-BA76-0FFFAEFDB88A}" dt="2025-09-22T21:28:05.608" v="21" actId="47"/>
-        <pc:sldMkLst>
-          <pc:docMk/>
-          <pc:sldMk cId="586211350" sldId="310"/>
-        </pc:sldMkLst>
-      </pc:sldChg>
-      <pc:sldChg chg="del">
-        <pc:chgData name="Zonghua Gu" userId="9a7e1853e1951ef5" providerId="LiveId" clId="{CF1FAA12-072C-4ED5-BA76-0FFFAEFDB88A}" dt="2025-09-28T19:38:42.867" v="41" actId="47"/>
-        <pc:sldMkLst>
-          <pc:docMk/>
-          <pc:sldMk cId="2573725380" sldId="311"/>
-        </pc:sldMkLst>
-      </pc:sldChg>
-      <pc:sldChg chg="modSp mod">
-        <pc:chgData name="Zonghua Gu" userId="9a7e1853e1951ef5" providerId="LiveId" clId="{CF1FAA12-072C-4ED5-BA76-0FFFAEFDB88A}" dt="2025-09-28T21:18:18.834" v="624" actId="20577"/>
-        <pc:sldMkLst>
-          <pc:docMk/>
-          <pc:sldMk cId="1363005958" sldId="312"/>
-        </pc:sldMkLst>
-      </pc:sldChg>
-      <pc:sldChg chg="del">
-        <pc:chgData name="Zonghua Gu" userId="9a7e1853e1951ef5" providerId="LiveId" clId="{CF1FAA12-072C-4ED5-BA76-0FFFAEFDB88A}" dt="2025-09-28T19:38:42.867" v="41" actId="47"/>
-        <pc:sldMkLst>
-          <pc:docMk/>
-          <pc:sldMk cId="2231599014" sldId="313"/>
-        </pc:sldMkLst>
       </pc:sldChg>
       <pc:sldChg chg="addSp delSp modSp mod">
         <pc:chgData name="Zonghua Gu" userId="9a7e1853e1951ef5" providerId="LiveId" clId="{CF1FAA12-072C-4ED5-BA76-0FFFAEFDB88A}" dt="2025-09-28T21:30:53.434" v="643" actId="478"/>
@@ -347,13 +222,6 @@
           </ac:spMkLst>
         </pc:spChg>
       </pc:sldChg>
-      <pc:sldChg chg="addSp delSp modSp mod">
-        <pc:chgData name="Zonghua Gu" userId="9a7e1853e1951ef5" providerId="LiveId" clId="{CF1FAA12-072C-4ED5-BA76-0FFFAEFDB88A}" dt="2025-09-28T20:42:25.930" v="481" actId="20577"/>
-        <pc:sldMkLst>
-          <pc:docMk/>
-          <pc:sldMk cId="1811287028" sldId="315"/>
-        </pc:sldMkLst>
-      </pc:sldChg>
       <pc:sldChg chg="addSp modSp new mod">
         <pc:chgData name="Zonghua Gu" userId="9a7e1853e1951ef5" providerId="LiveId" clId="{CF1FAA12-072C-4ED5-BA76-0FFFAEFDB88A}" dt="2025-10-14T21:43:43.499" v="879" actId="20577"/>
         <pc:sldMkLst>
@@ -376,14 +244,6 @@
             <ac:spMk id="4" creationId="{306AF55F-06A9-F112-5FB4-9B7BF0166B2C}"/>
           </ac:spMkLst>
         </pc:spChg>
-        <pc:graphicFrameChg chg="add mod">
-          <ac:chgData name="Zonghua Gu" userId="9a7e1853e1951ef5" providerId="LiveId" clId="{CF1FAA12-072C-4ED5-BA76-0FFFAEFDB88A}" dt="2025-10-14T21:42:08.891" v="849"/>
-          <ac:graphicFrameMkLst>
-            <pc:docMk/>
-            <pc:sldMk cId="711508281" sldId="316"/>
-            <ac:graphicFrameMk id="5" creationId="{A6BA43DB-5943-1342-3C51-C137D2DDB929}"/>
-          </ac:graphicFrameMkLst>
-        </pc:graphicFrameChg>
         <pc:graphicFrameChg chg="add mod modGraphic">
           <ac:chgData name="Zonghua Gu" userId="9a7e1853e1951ef5" providerId="LiveId" clId="{CF1FAA12-072C-4ED5-BA76-0FFFAEFDB88A}" dt="2025-10-14T21:43:04.594" v="859" actId="14100"/>
           <ac:graphicFrameMkLst>
@@ -392,20 +252,6 @@
             <ac:graphicFrameMk id="6" creationId="{03ED02B2-B7A4-6AE0-0F84-7EDDFDACF3E1}"/>
           </ac:graphicFrameMkLst>
         </pc:graphicFrameChg>
-      </pc:sldChg>
-      <pc:sldChg chg="addSp delSp modSp mod">
-        <pc:chgData name="Zonghua Gu" userId="9a7e1853e1951ef5" providerId="LiveId" clId="{CF1FAA12-072C-4ED5-BA76-0FFFAEFDB88A}" dt="2025-09-28T20:42:31.389" v="482" actId="20577"/>
-        <pc:sldMkLst>
-          <pc:docMk/>
-          <pc:sldMk cId="3843227747" sldId="316"/>
-        </pc:sldMkLst>
-      </pc:sldChg>
-      <pc:sldChg chg="addSp delSp modSp mod">
-        <pc:chgData name="Zonghua Gu" userId="9a7e1853e1951ef5" providerId="LiveId" clId="{CF1FAA12-072C-4ED5-BA76-0FFFAEFDB88A}" dt="2025-09-28T20:42:43.569" v="485" actId="478"/>
-        <pc:sldMkLst>
-          <pc:docMk/>
-          <pc:sldMk cId="178264963" sldId="317"/>
-        </pc:sldMkLst>
       </pc:sldChg>
       <pc:sldChg chg="addSp modSp new mod">
         <pc:chgData name="Zonghua Gu" userId="9a7e1853e1951ef5" providerId="LiveId" clId="{CF1FAA12-072C-4ED5-BA76-0FFFAEFDB88A}" dt="2025-10-14T21:48:38.168" v="912" actId="14100"/>
@@ -429,22 +275,6 @@
             <ac:spMk id="4" creationId="{01048E9F-978D-E1AC-E55B-891E2B164B3B}"/>
           </ac:spMkLst>
         </pc:spChg>
-        <pc:graphicFrameChg chg="add mod">
-          <ac:chgData name="Zonghua Gu" userId="9a7e1853e1951ef5" providerId="LiveId" clId="{CF1FAA12-072C-4ED5-BA76-0FFFAEFDB88A}" dt="2025-10-14T21:43:59.140" v="883"/>
-          <ac:graphicFrameMkLst>
-            <pc:docMk/>
-            <pc:sldMk cId="1263936613" sldId="317"/>
-            <ac:graphicFrameMk id="5" creationId="{E144F219-1F52-8B16-FD60-98220DA47FE4}"/>
-          </ac:graphicFrameMkLst>
-        </pc:graphicFrameChg>
-        <pc:graphicFrameChg chg="add mod modGraphic">
-          <ac:chgData name="Zonghua Gu" userId="9a7e1853e1951ef5" providerId="LiveId" clId="{CF1FAA12-072C-4ED5-BA76-0FFFAEFDB88A}" dt="2025-10-14T21:44:42.250" v="891" actId="2162"/>
-          <ac:graphicFrameMkLst>
-            <pc:docMk/>
-            <pc:sldMk cId="1263936613" sldId="317"/>
-            <ac:graphicFrameMk id="6" creationId="{A085E1FE-19D1-7C68-7291-2C774DA7BF91}"/>
-          </ac:graphicFrameMkLst>
-        </pc:graphicFrameChg>
         <pc:graphicFrameChg chg="add mod modGraphic">
           <ac:chgData name="Zonghua Gu" userId="9a7e1853e1951ef5" providerId="LiveId" clId="{CF1FAA12-072C-4ED5-BA76-0FFFAEFDB88A}" dt="2025-10-14T21:48:38.168" v="912" actId="14100"/>
           <ac:graphicFrameMkLst>
@@ -454,299 +284,21 @@
           </ac:graphicFrameMkLst>
         </pc:graphicFrameChg>
       </pc:sldChg>
-      <pc:sldChg chg="del">
-        <pc:chgData name="Zonghua Gu" userId="9a7e1853e1951ef5" providerId="LiveId" clId="{CF1FAA12-072C-4ED5-BA76-0FFFAEFDB88A}" dt="2025-09-28T19:38:42.867" v="41" actId="47"/>
+      <pc:sldChg chg="addSp new mod">
+        <pc:chgData name="Zonghua Gu" userId="9a7e1853e1951ef5" providerId="LiveId" clId="{CF1FAA12-072C-4ED5-BA76-0FFFAEFDB88A}" dt="2025-10-21T21:45:06.437" v="914" actId="22"/>
         <pc:sldMkLst>
           <pc:docMk/>
-          <pc:sldMk cId="1182917876" sldId="318"/>
+          <pc:sldMk cId="2981500173" sldId="318"/>
         </pc:sldMkLst>
+        <pc:picChg chg="add">
+          <ac:chgData name="Zonghua Gu" userId="9a7e1853e1951ef5" providerId="LiveId" clId="{CF1FAA12-072C-4ED5-BA76-0FFFAEFDB88A}" dt="2025-10-21T21:45:06.437" v="914" actId="22"/>
+          <ac:picMkLst>
+            <pc:docMk/>
+            <pc:sldMk cId="2981500173" sldId="318"/>
+            <ac:picMk id="6" creationId="{3E2493B5-D169-7537-3C49-9EF38B6F675E}"/>
+          </ac:picMkLst>
+        </pc:picChg>
       </pc:sldChg>
-      <pc:sldChg chg="del">
-        <pc:chgData name="Zonghua Gu" userId="9a7e1853e1951ef5" providerId="LiveId" clId="{CF1FAA12-072C-4ED5-BA76-0FFFAEFDB88A}" dt="2025-09-28T19:38:42.867" v="41" actId="47"/>
-        <pc:sldMkLst>
-          <pc:docMk/>
-          <pc:sldMk cId="2889144330" sldId="319"/>
-        </pc:sldMkLst>
-      </pc:sldChg>
-      <pc:sldChg chg="addSp delSp modSp mod">
-        <pc:chgData name="Zonghua Gu" userId="9a7e1853e1951ef5" providerId="LiveId" clId="{CF1FAA12-072C-4ED5-BA76-0FFFAEFDB88A}" dt="2025-09-28T20:17:52.023" v="314" actId="478"/>
-        <pc:sldMkLst>
-          <pc:docMk/>
-          <pc:sldMk cId="4074743863" sldId="321"/>
-        </pc:sldMkLst>
-      </pc:sldChg>
-      <pc:sldChg chg="del">
-        <pc:chgData name="Zonghua Gu" userId="9a7e1853e1951ef5" providerId="LiveId" clId="{CF1FAA12-072C-4ED5-BA76-0FFFAEFDB88A}" dt="2025-09-28T19:38:42.867" v="41" actId="47"/>
-        <pc:sldMkLst>
-          <pc:docMk/>
-          <pc:sldMk cId="1271958434" sldId="322"/>
-        </pc:sldMkLst>
-      </pc:sldChg>
-      <pc:sldChg chg="del">
-        <pc:chgData name="Zonghua Gu" userId="9a7e1853e1951ef5" providerId="LiveId" clId="{CF1FAA12-072C-4ED5-BA76-0FFFAEFDB88A}" dt="2025-09-28T19:38:42.867" v="41" actId="47"/>
-        <pc:sldMkLst>
-          <pc:docMk/>
-          <pc:sldMk cId="4107115112" sldId="323"/>
-        </pc:sldMkLst>
-      </pc:sldChg>
-      <pc:sldChg chg="del">
-        <pc:chgData name="Zonghua Gu" userId="9a7e1853e1951ef5" providerId="LiveId" clId="{CF1FAA12-072C-4ED5-BA76-0FFFAEFDB88A}" dt="2025-09-28T19:38:42.867" v="41" actId="47"/>
-        <pc:sldMkLst>
-          <pc:docMk/>
-          <pc:sldMk cId="2719984395" sldId="324"/>
-        </pc:sldMkLst>
-      </pc:sldChg>
-      <pc:sldChg chg="del">
-        <pc:chgData name="Zonghua Gu" userId="9a7e1853e1951ef5" providerId="LiveId" clId="{CF1FAA12-072C-4ED5-BA76-0FFFAEFDB88A}" dt="2025-09-28T19:38:42.867" v="41" actId="47"/>
-        <pc:sldMkLst>
-          <pc:docMk/>
-          <pc:sldMk cId="1063495253" sldId="326"/>
-        </pc:sldMkLst>
-      </pc:sldChg>
-      <pc:sldChg chg="del">
-        <pc:chgData name="Zonghua Gu" userId="9a7e1853e1951ef5" providerId="LiveId" clId="{CF1FAA12-072C-4ED5-BA76-0FFFAEFDB88A}" dt="2025-09-28T19:38:42.867" v="41" actId="47"/>
-        <pc:sldMkLst>
-          <pc:docMk/>
-          <pc:sldMk cId="134236884" sldId="327"/>
-        </pc:sldMkLst>
-      </pc:sldChg>
-      <pc:sldChg chg="del">
-        <pc:chgData name="Zonghua Gu" userId="9a7e1853e1951ef5" providerId="LiveId" clId="{CF1FAA12-072C-4ED5-BA76-0FFFAEFDB88A}" dt="2025-09-28T19:38:42.867" v="41" actId="47"/>
-        <pc:sldMkLst>
-          <pc:docMk/>
-          <pc:sldMk cId="1363681695" sldId="328"/>
-        </pc:sldMkLst>
-      </pc:sldChg>
-      <pc:sldChg chg="addSp modSp mod">
-        <pc:chgData name="Zonghua Gu" userId="9a7e1853e1951ef5" providerId="LiveId" clId="{CF1FAA12-072C-4ED5-BA76-0FFFAEFDB88A}" dt="2025-09-28T21:16:09.451" v="621" actId="1076"/>
-        <pc:sldMkLst>
-          <pc:docMk/>
-          <pc:sldMk cId="1058672256" sldId="329"/>
-        </pc:sldMkLst>
-      </pc:sldChg>
-      <pc:sldChg chg="addSp delSp modSp new mod modAnim">
-        <pc:chgData name="Zonghua Gu" userId="9a7e1853e1951ef5" providerId="LiveId" clId="{CF1FAA12-072C-4ED5-BA76-0FFFAEFDB88A}" dt="2025-09-28T19:49:02.519" v="113"/>
-        <pc:sldMkLst>
-          <pc:docMk/>
-          <pc:sldMk cId="428946599" sldId="330"/>
-        </pc:sldMkLst>
-      </pc:sldChg>
-      <pc:sldChg chg="addSp delSp modSp add mod delAnim modAnim">
-        <pc:chgData name="Zonghua Gu" userId="9a7e1853e1951ef5" providerId="LiveId" clId="{CF1FAA12-072C-4ED5-BA76-0FFFAEFDB88A}" dt="2025-09-28T19:52:40.491" v="125" actId="1076"/>
-        <pc:sldMkLst>
-          <pc:docMk/>
-          <pc:sldMk cId="2294325802" sldId="331"/>
-        </pc:sldMkLst>
-      </pc:sldChg>
-      <pc:sldChg chg="addSp modSp add del">
-        <pc:chgData name="Zonghua Gu" userId="9a7e1853e1951ef5" providerId="LiveId" clId="{CF1FAA12-072C-4ED5-BA76-0FFFAEFDB88A}" dt="2025-09-28T20:23:21.008" v="331" actId="47"/>
-        <pc:sldMkLst>
-          <pc:docMk/>
-          <pc:sldMk cId="298946678" sldId="332"/>
-        </pc:sldMkLst>
-      </pc:sldChg>
-      <pc:sldChg chg="add">
-        <pc:chgData name="Zonghua Gu" userId="9a7e1853e1951ef5" providerId="LiveId" clId="{CF1FAA12-072C-4ED5-BA76-0FFFAEFDB88A}" dt="2025-09-28T20:23:42.044" v="332"/>
-        <pc:sldMkLst>
-          <pc:docMk/>
-          <pc:sldMk cId="4125610159" sldId="332"/>
-        </pc:sldMkLst>
-      </pc:sldChg>
-      <pc:sldChg chg="add del">
-        <pc:chgData name="Zonghua Gu" userId="9a7e1853e1951ef5" providerId="LiveId" clId="{CF1FAA12-072C-4ED5-BA76-0FFFAEFDB88A}" dt="2025-09-28T20:23:21.008" v="331" actId="47"/>
-        <pc:sldMkLst>
-          <pc:docMk/>
-          <pc:sldMk cId="439551089" sldId="333"/>
-        </pc:sldMkLst>
-      </pc:sldChg>
-      <pc:sldChg chg="add">
-        <pc:chgData name="Zonghua Gu" userId="9a7e1853e1951ef5" providerId="LiveId" clId="{CF1FAA12-072C-4ED5-BA76-0FFFAEFDB88A}" dt="2025-09-28T20:23:42.044" v="332"/>
-        <pc:sldMkLst>
-          <pc:docMk/>
-          <pc:sldMk cId="2323096949" sldId="333"/>
-        </pc:sldMkLst>
-      </pc:sldChg>
-      <pc:sldChg chg="add del">
-        <pc:chgData name="Zonghua Gu" userId="9a7e1853e1951ef5" providerId="LiveId" clId="{CF1FAA12-072C-4ED5-BA76-0FFFAEFDB88A}" dt="2025-09-28T20:23:21.008" v="331" actId="47"/>
-        <pc:sldMkLst>
-          <pc:docMk/>
-          <pc:sldMk cId="3324624948" sldId="334"/>
-        </pc:sldMkLst>
-      </pc:sldChg>
-      <pc:sldChg chg="add">
-        <pc:chgData name="Zonghua Gu" userId="9a7e1853e1951ef5" providerId="LiveId" clId="{CF1FAA12-072C-4ED5-BA76-0FFFAEFDB88A}" dt="2025-09-28T20:23:42.044" v="332"/>
-        <pc:sldMkLst>
-          <pc:docMk/>
-          <pc:sldMk cId="3974902252" sldId="334"/>
-        </pc:sldMkLst>
-      </pc:sldChg>
-      <pc:sldChg chg="modSp new mod">
-        <pc:chgData name="Zonghua Gu" userId="9a7e1853e1951ef5" providerId="LiveId" clId="{CF1FAA12-072C-4ED5-BA76-0FFFAEFDB88A}" dt="2025-09-28T20:27:06.193" v="379" actId="20577"/>
-        <pc:sldMkLst>
-          <pc:docMk/>
-          <pc:sldMk cId="837827846" sldId="335"/>
-        </pc:sldMkLst>
-      </pc:sldChg>
-      <pc:sldChg chg="modSp new del mod">
-        <pc:chgData name="Zonghua Gu" userId="9a7e1853e1951ef5" providerId="LiveId" clId="{CF1FAA12-072C-4ED5-BA76-0FFFAEFDB88A}" dt="2025-10-06T12:57:16.826" v="677" actId="47"/>
-        <pc:sldMkLst>
-          <pc:docMk/>
-          <pc:sldMk cId="1269769883" sldId="336"/>
-        </pc:sldMkLst>
-      </pc:sldChg>
-      <pc:sldChg chg="addSp modSp add mod">
-        <pc:chgData name="Zonghua Gu" userId="9a7e1853e1951ef5" providerId="LiveId" clId="{CF1FAA12-072C-4ED5-BA76-0FFFAEFDB88A}" dt="2025-09-28T21:00:29.512" v="564" actId="1076"/>
-        <pc:sldMkLst>
-          <pc:docMk/>
-          <pc:sldMk cId="428035047" sldId="337"/>
-        </pc:sldMkLst>
-      </pc:sldChg>
-      <pc:sldChg chg="add del">
-        <pc:chgData name="Zonghua Gu" userId="9a7e1853e1951ef5" providerId="LiveId" clId="{CF1FAA12-072C-4ED5-BA76-0FFFAEFDB88A}" dt="2025-09-28T20:48:38.609" v="546" actId="47"/>
-        <pc:sldMkLst>
-          <pc:docMk/>
-          <pc:sldMk cId="1542477397" sldId="337"/>
-        </pc:sldMkLst>
-      </pc:sldChg>
-      <pc:sldChg chg="modSp add mod ord">
-        <pc:chgData name="Zonghua Gu" userId="9a7e1853e1951ef5" providerId="LiveId" clId="{CF1FAA12-072C-4ED5-BA76-0FFFAEFDB88A}" dt="2025-09-28T21:00:56.494" v="568" actId="207"/>
-        <pc:sldMkLst>
-          <pc:docMk/>
-          <pc:sldMk cId="2066005274" sldId="349"/>
-        </pc:sldMkLst>
-      </pc:sldChg>
-      <pc:sldChg chg="addSp modSp new del mod modAnim">
-        <pc:chgData name="Zonghua Gu" userId="9a7e1853e1951ef5" providerId="LiveId" clId="{CF1FAA12-072C-4ED5-BA76-0FFFAEFDB88A}" dt="2025-10-06T00:41:21.204" v="655" actId="2696"/>
-        <pc:sldMkLst>
-          <pc:docMk/>
-          <pc:sldMk cId="1824905775" sldId="350"/>
-        </pc:sldMkLst>
-      </pc:sldChg>
-      <pc:sldChg chg="addSp modSp new mod modAnim">
-        <pc:chgData name="Zonghua Gu" userId="9a7e1853e1951ef5" providerId="LiveId" clId="{CF1FAA12-072C-4ED5-BA76-0FFFAEFDB88A}" dt="2025-10-06T00:44:47.420" v="676" actId="20577"/>
-        <pc:sldMkLst>
-          <pc:docMk/>
-          <pc:sldMk cId="2402349904" sldId="350"/>
-        </pc:sldMkLst>
-      </pc:sldChg>
-      <pc:sldChg chg="modSp new mod">
-        <pc:chgData name="Zonghua Gu" userId="9a7e1853e1951ef5" providerId="LiveId" clId="{CF1FAA12-072C-4ED5-BA76-0FFFAEFDB88A}" dt="2025-10-06T13:08:00.564" v="792" actId="20577"/>
-        <pc:sldMkLst>
-          <pc:docMk/>
-          <pc:sldMk cId="1161542869" sldId="351"/>
-        </pc:sldMkLst>
-      </pc:sldChg>
-      <pc:sldMasterChg chg="del delSldLayout">
-        <pc:chgData name="Zonghua Gu" userId="9a7e1853e1951ef5" providerId="LiveId" clId="{CF1FAA12-072C-4ED5-BA76-0FFFAEFDB88A}" dt="2025-09-22T21:28:05.608" v="21" actId="47"/>
-        <pc:sldMasterMkLst>
-          <pc:docMk/>
-          <pc:sldMasterMk cId="2048598753" sldId="2147483684"/>
-        </pc:sldMasterMkLst>
-        <pc:sldLayoutChg chg="del">
-          <pc:chgData name="Zonghua Gu" userId="9a7e1853e1951ef5" providerId="LiveId" clId="{CF1FAA12-072C-4ED5-BA76-0FFFAEFDB88A}" dt="2025-09-22T21:28:05.608" v="21" actId="47"/>
-          <pc:sldLayoutMkLst>
-            <pc:docMk/>
-            <pc:sldMasterMk cId="2048598753" sldId="2147483684"/>
-            <pc:sldLayoutMk cId="2792416664" sldId="2147483685"/>
-          </pc:sldLayoutMkLst>
-        </pc:sldLayoutChg>
-        <pc:sldLayoutChg chg="del">
-          <pc:chgData name="Zonghua Gu" userId="9a7e1853e1951ef5" providerId="LiveId" clId="{CF1FAA12-072C-4ED5-BA76-0FFFAEFDB88A}" dt="2025-09-22T21:28:05.608" v="21" actId="47"/>
-          <pc:sldLayoutMkLst>
-            <pc:docMk/>
-            <pc:sldMasterMk cId="2048598753" sldId="2147483684"/>
-            <pc:sldLayoutMk cId="3643777705" sldId="2147483686"/>
-          </pc:sldLayoutMkLst>
-        </pc:sldLayoutChg>
-        <pc:sldLayoutChg chg="del">
-          <pc:chgData name="Zonghua Gu" userId="9a7e1853e1951ef5" providerId="LiveId" clId="{CF1FAA12-072C-4ED5-BA76-0FFFAEFDB88A}" dt="2025-09-22T21:28:05.608" v="21" actId="47"/>
-          <pc:sldLayoutMkLst>
-            <pc:docMk/>
-            <pc:sldMasterMk cId="2048598753" sldId="2147483684"/>
-            <pc:sldLayoutMk cId="3657332555" sldId="2147483687"/>
-          </pc:sldLayoutMkLst>
-        </pc:sldLayoutChg>
-        <pc:sldLayoutChg chg="del">
-          <pc:chgData name="Zonghua Gu" userId="9a7e1853e1951ef5" providerId="LiveId" clId="{CF1FAA12-072C-4ED5-BA76-0FFFAEFDB88A}" dt="2025-09-22T21:28:05.608" v="21" actId="47"/>
-          <pc:sldLayoutMkLst>
-            <pc:docMk/>
-            <pc:sldMasterMk cId="2048598753" sldId="2147483684"/>
-            <pc:sldLayoutMk cId="2712397163" sldId="2147483688"/>
-          </pc:sldLayoutMkLst>
-        </pc:sldLayoutChg>
-        <pc:sldLayoutChg chg="del">
-          <pc:chgData name="Zonghua Gu" userId="9a7e1853e1951ef5" providerId="LiveId" clId="{CF1FAA12-072C-4ED5-BA76-0FFFAEFDB88A}" dt="2025-09-22T21:28:05.608" v="21" actId="47"/>
-          <pc:sldLayoutMkLst>
-            <pc:docMk/>
-            <pc:sldMasterMk cId="2048598753" sldId="2147483684"/>
-            <pc:sldLayoutMk cId="2187388915" sldId="2147483689"/>
-          </pc:sldLayoutMkLst>
-        </pc:sldLayoutChg>
-        <pc:sldLayoutChg chg="del">
-          <pc:chgData name="Zonghua Gu" userId="9a7e1853e1951ef5" providerId="LiveId" clId="{CF1FAA12-072C-4ED5-BA76-0FFFAEFDB88A}" dt="2025-09-22T21:28:05.608" v="21" actId="47"/>
-          <pc:sldLayoutMkLst>
-            <pc:docMk/>
-            <pc:sldMasterMk cId="2048598753" sldId="2147483684"/>
-            <pc:sldLayoutMk cId="683193793" sldId="2147483690"/>
-          </pc:sldLayoutMkLst>
-        </pc:sldLayoutChg>
-        <pc:sldLayoutChg chg="del">
-          <pc:chgData name="Zonghua Gu" userId="9a7e1853e1951ef5" providerId="LiveId" clId="{CF1FAA12-072C-4ED5-BA76-0FFFAEFDB88A}" dt="2025-09-22T21:28:05.608" v="21" actId="47"/>
-          <pc:sldLayoutMkLst>
-            <pc:docMk/>
-            <pc:sldMasterMk cId="2048598753" sldId="2147483684"/>
-            <pc:sldLayoutMk cId="497172582" sldId="2147483691"/>
-          </pc:sldLayoutMkLst>
-        </pc:sldLayoutChg>
-        <pc:sldLayoutChg chg="del">
-          <pc:chgData name="Zonghua Gu" userId="9a7e1853e1951ef5" providerId="LiveId" clId="{CF1FAA12-072C-4ED5-BA76-0FFFAEFDB88A}" dt="2025-09-22T21:28:05.608" v="21" actId="47"/>
-          <pc:sldLayoutMkLst>
-            <pc:docMk/>
-            <pc:sldMasterMk cId="2048598753" sldId="2147483684"/>
-            <pc:sldLayoutMk cId="2509342062" sldId="2147483692"/>
-          </pc:sldLayoutMkLst>
-        </pc:sldLayoutChg>
-        <pc:sldLayoutChg chg="del">
-          <pc:chgData name="Zonghua Gu" userId="9a7e1853e1951ef5" providerId="LiveId" clId="{CF1FAA12-072C-4ED5-BA76-0FFFAEFDB88A}" dt="2025-09-22T21:28:05.608" v="21" actId="47"/>
-          <pc:sldLayoutMkLst>
-            <pc:docMk/>
-            <pc:sldMasterMk cId="2048598753" sldId="2147483684"/>
-            <pc:sldLayoutMk cId="1146008632" sldId="2147483693"/>
-          </pc:sldLayoutMkLst>
-        </pc:sldLayoutChg>
-        <pc:sldLayoutChg chg="del">
-          <pc:chgData name="Zonghua Gu" userId="9a7e1853e1951ef5" providerId="LiveId" clId="{CF1FAA12-072C-4ED5-BA76-0FFFAEFDB88A}" dt="2025-09-22T21:28:05.608" v="21" actId="47"/>
-          <pc:sldLayoutMkLst>
-            <pc:docMk/>
-            <pc:sldMasterMk cId="2048598753" sldId="2147483684"/>
-            <pc:sldLayoutMk cId="3515496529" sldId="2147483694"/>
-          </pc:sldLayoutMkLst>
-        </pc:sldLayoutChg>
-        <pc:sldLayoutChg chg="del">
-          <pc:chgData name="Zonghua Gu" userId="9a7e1853e1951ef5" providerId="LiveId" clId="{CF1FAA12-072C-4ED5-BA76-0FFFAEFDB88A}" dt="2025-09-22T21:28:05.608" v="21" actId="47"/>
-          <pc:sldLayoutMkLst>
-            <pc:docMk/>
-            <pc:sldMasterMk cId="2048598753" sldId="2147483684"/>
-            <pc:sldLayoutMk cId="775773720" sldId="2147483695"/>
-          </pc:sldLayoutMkLst>
-        </pc:sldLayoutChg>
-        <pc:sldLayoutChg chg="del">
-          <pc:chgData name="Zonghua Gu" userId="9a7e1853e1951ef5" providerId="LiveId" clId="{CF1FAA12-072C-4ED5-BA76-0FFFAEFDB88A}" dt="2025-09-22T21:28:05.608" v="21" actId="47"/>
-          <pc:sldLayoutMkLst>
-            <pc:docMk/>
-            <pc:sldMasterMk cId="2048598753" sldId="2147483684"/>
-            <pc:sldLayoutMk cId="3518001714" sldId="2147483696"/>
-          </pc:sldLayoutMkLst>
-        </pc:sldLayoutChg>
-        <pc:sldLayoutChg chg="del">
-          <pc:chgData name="Zonghua Gu" userId="9a7e1853e1951ef5" providerId="LiveId" clId="{CF1FAA12-072C-4ED5-BA76-0FFFAEFDB88A}" dt="2025-09-22T21:28:05.608" v="21" actId="47"/>
-          <pc:sldLayoutMkLst>
-            <pc:docMk/>
-            <pc:sldMasterMk cId="2048598753" sldId="2147483684"/>
-            <pc:sldLayoutMk cId="549915692" sldId="2147483697"/>
-          </pc:sldLayoutMkLst>
-        </pc:sldLayoutChg>
-      </pc:sldMasterChg>
     </pc:docChg>
   </pc:docChgLst>
 </pc:chgInfo>
@@ -835,7 +387,7 @@
             <a:fld id="{BD4F56A7-3CDE-194F-B9AF-D598FBBF1989}" type="datetimeFigureOut">
               <a:rPr lang="en-US" smtClean="0"/>
               <a:pPr/>
-              <a:t>10/14/2025</a:t>
+              <a:t>10/21/2025</a:t>
             </a:fld>
             <a:endParaRPr lang="en-US"/>
           </a:p>
@@ -1003,7 +555,7 @@
             <a:fld id="{1E52AD58-60CE-E948-9CBA-0BD7030FC28E}" type="datetimeFigureOut">
               <a:rPr lang="en-US" smtClean="0"/>
               <a:pPr/>
-              <a:t>10/14/2025</a:t>
+              <a:t>10/21/2025</a:t>
             </a:fld>
             <a:endParaRPr lang="en-US"/>
           </a:p>
@@ -1418,6 +970,94 @@
 </p:notes>
 </file>
 
+<file path=ppt/notesSlides/notesSlide2.xml><?xml version="1.0" encoding="utf-8"?>
+<p:notes xmlns:a="http://schemas.openxmlformats.org/drawingml/2006/main" xmlns:r="http://schemas.openxmlformats.org/officeDocument/2006/relationships" xmlns:p="http://schemas.openxmlformats.org/presentationml/2006/main">
+  <p:cSld>
+    <p:spTree>
+      <p:nvGrpSpPr>
+        <p:cNvPr id="1" name=""/>
+        <p:cNvGrpSpPr/>
+        <p:nvPr/>
+      </p:nvGrpSpPr>
+      <p:grpSpPr>
+        <a:xfrm>
+          <a:off x="0" y="0"/>
+          <a:ext cx="0" cy="0"/>
+          <a:chOff x="0" y="0"/>
+          <a:chExt cx="0" cy="0"/>
+        </a:xfrm>
+      </p:grpSpPr>
+      <p:sp>
+        <p:nvSpPr>
+          <p:cNvPr id="2" name="Slide Image Placeholder 1"/>
+          <p:cNvSpPr>
+            <a:spLocks noGrp="1" noRot="1" noChangeAspect="1"/>
+          </p:cNvSpPr>
+          <p:nvPr>
+            <p:ph type="sldImg"/>
+          </p:nvPr>
+        </p:nvSpPr>
+        <p:spPr/>
+      </p:sp>
+      <p:sp>
+        <p:nvSpPr>
+          <p:cNvPr id="3" name="Notes Placeholder 2"/>
+          <p:cNvSpPr>
+            <a:spLocks noGrp="1"/>
+          </p:cNvSpPr>
+          <p:nvPr>
+            <p:ph type="body" idx="1"/>
+          </p:nvPr>
+        </p:nvSpPr>
+        <p:spPr/>
+        <p:txBody>
+          <a:bodyPr/>
+          <a:lstStyle/>
+          <a:p>
+            <a:r>
+              <a:rPr lang="en-US"/>
+              <a:t>https://www.youtube.com/watch?v=aEPzJrmACMw&amp;list=PLHv6klbVebn0pCLcmCxGVa7ZPx7CB01Rh&amp;index=4</a:t>
+            </a:r>
+          </a:p>
+        </p:txBody>
+      </p:sp>
+      <p:sp>
+        <p:nvSpPr>
+          <p:cNvPr id="4" name="Slide Number Placeholder 3"/>
+          <p:cNvSpPr>
+            <a:spLocks noGrp="1"/>
+          </p:cNvSpPr>
+          <p:nvPr>
+            <p:ph type="sldNum" sz="quarter" idx="5"/>
+          </p:nvPr>
+        </p:nvSpPr>
+        <p:spPr/>
+        <p:txBody>
+          <a:bodyPr/>
+          <a:lstStyle/>
+          <a:p>
+            <a:fld id="{D624DF53-3DD3-9F45-9E7E-472B96F1AB81}" type="slidenum">
+              <a:rPr lang="en-US" smtClean="0"/>
+              <a:pPr/>
+              <a:t>6</a:t>
+            </a:fld>
+            <a:endParaRPr lang="en-US"/>
+          </a:p>
+        </p:txBody>
+      </p:sp>
+    </p:spTree>
+    <p:extLst>
+      <p:ext uri="{BB962C8B-B14F-4D97-AF65-F5344CB8AC3E}">
+        <p14:creationId xmlns:p14="http://schemas.microsoft.com/office/powerpoint/2010/main" val="323097049"/>
+      </p:ext>
+    </p:extLst>
+  </p:cSld>
+  <p:clrMapOvr>
+    <a:masterClrMapping/>
+  </p:clrMapOvr>
+</p:notes>
+</file>
+
 <file path=ppt/slideLayouts/slideLayout1.xml><?xml version="1.0" encoding="utf-8"?>
 <p:sldLayout xmlns:a="http://schemas.openxmlformats.org/drawingml/2006/main" xmlns:r="http://schemas.openxmlformats.org/officeDocument/2006/relationships" xmlns:p="http://schemas.openxmlformats.org/presentationml/2006/main" showMasterSp="0" type="title" preserve="1">
   <p:cSld name="Title Slide">
@@ -1560,7 +1200,7 @@
             <a:pPr eaLnBrk="1" latinLnBrk="0" hangingPunct="1"/>
             <a:fld id="{8E8B2B42-CBC2-7D4E-BA50-0E7F29B4DAAB}" type="datetime1">
               <a:rPr lang="en-US" smtClean="0"/>
-              <a:t>10/14/2025</a:t>
+              <a:t>10/21/2025</a:t>
             </a:fld>
             <a:endParaRPr lang="en-US" sz="1600" dirty="0"/>
           </a:p>
@@ -1920,7 +1560,7 @@
             <a:pPr eaLnBrk="1" latinLnBrk="0" hangingPunct="1"/>
             <a:fld id="{597D1259-3A46-254C-ADDB-B5DA4F1DF3DA}" type="datetime1">
               <a:rPr lang="en-US" smtClean="0"/>
-              <a:t>10/14/2025</a:t>
+              <a:t>10/21/2025</a:t>
             </a:fld>
             <a:endParaRPr lang="en-US"/>
           </a:p>
@@ -2096,7 +1736,7 @@
             <a:pPr eaLnBrk="1" latinLnBrk="0" hangingPunct="1"/>
             <a:fld id="{CCA104EC-54AA-E04F-BDC0-22B4E8892699}" type="datetime1">
               <a:rPr lang="en-US" smtClean="0"/>
-              <a:t>10/14/2025</a:t>
+              <a:t>10/21/2025</a:t>
             </a:fld>
             <a:endParaRPr lang="en-US"/>
           </a:p>
@@ -2417,7 +2057,7 @@
             <a:pPr eaLnBrk="1" latinLnBrk="0" hangingPunct="1"/>
             <a:fld id="{3B6732A1-8A50-42D0-9FB5-A7CC4F887D83}" type="datetime1">
               <a:rPr lang="en-US" smtClean="0"/>
-              <a:t>10/14/2025</a:t>
+              <a:t>10/21/2025</a:t>
             </a:fld>
             <a:endParaRPr lang="en-US" sz="1200" dirty="0"/>
           </a:p>
@@ -2730,7 +2370,7 @@
             <a:pPr eaLnBrk="1" latinLnBrk="0" hangingPunct="1"/>
             <a:fld id="{44B809B3-6A2C-46CF-98AB-C7B45372B065}" type="datetime1">
               <a:rPr lang="en-US" smtClean="0"/>
-              <a:t>10/14/2025</a:t>
+              <a:t>10/21/2025</a:t>
             </a:fld>
             <a:endParaRPr lang="en-US" dirty="0"/>
           </a:p>
@@ -3005,7 +2645,7 @@
             <a:pPr eaLnBrk="1" latinLnBrk="0" hangingPunct="1"/>
             <a:fld id="{C191117F-3CD7-4767-AEE5-49A060274EAA}" type="datetime1">
               <a:rPr lang="en-US" smtClean="0"/>
-              <a:t>10/14/2025</a:t>
+              <a:t>10/21/2025</a:t>
             </a:fld>
             <a:endParaRPr lang="en-US" dirty="0"/>
           </a:p>
@@ -3231,7 +2871,7 @@
             <a:pPr eaLnBrk="1" latinLnBrk="0" hangingPunct="1"/>
             <a:fld id="{47B8C5CE-9DF7-4BB4-863A-6E277DDC03D4}" type="datetime1">
               <a:rPr lang="en-US" smtClean="0"/>
-              <a:t>10/14/2025</a:t>
+              <a:t>10/21/2025</a:t>
             </a:fld>
             <a:endParaRPr lang="en-US"/>
           </a:p>
@@ -3589,7 +3229,7 @@
             <a:pPr eaLnBrk="1" latinLnBrk="0" hangingPunct="1"/>
             <a:fld id="{5EE11402-9D83-40E7-9253-0548CE63EB94}" type="datetime1">
               <a:rPr lang="en-US" smtClean="0"/>
-              <a:t>10/14/2025</a:t>
+              <a:t>10/21/2025</a:t>
             </a:fld>
             <a:endParaRPr lang="en-US"/>
           </a:p>
@@ -3827,7 +3467,7 @@
             <a:pPr eaLnBrk="1" latinLnBrk="0" hangingPunct="1"/>
             <a:fld id="{0C0C8811-C7DA-4658-BB60-F635F9220CDF}" type="datetime1">
               <a:rPr lang="en-US" smtClean="0"/>
-              <a:t>10/14/2025</a:t>
+              <a:t>10/21/2025</a:t>
             </a:fld>
             <a:endParaRPr lang="en-US"/>
           </a:p>
@@ -3974,7 +3614,7 @@
             <a:pPr eaLnBrk="1" latinLnBrk="0" hangingPunct="1"/>
             <a:fld id="{2EB38FCF-5E28-44CB-A212-D3E75CA77D8D}" type="datetime1">
               <a:rPr lang="en-US" smtClean="0"/>
-              <a:t>10/14/2025</a:t>
+              <a:t>10/21/2025</a:t>
             </a:fld>
             <a:endParaRPr lang="en-US"/>
           </a:p>
@@ -4257,7 +3897,7 @@
             <a:pPr eaLnBrk="1" latinLnBrk="0" hangingPunct="1"/>
             <a:fld id="{755FE7C6-0DE5-4400-A2DD-37AB2CB98797}" type="datetime1">
               <a:rPr lang="en-US" smtClean="0"/>
-              <a:t>10/14/2025</a:t>
+              <a:t>10/21/2025</a:t>
             </a:fld>
             <a:endParaRPr lang="en-US"/>
           </a:p>
@@ -4555,7 +4195,7 @@
             <a:pPr eaLnBrk="1" latinLnBrk="0" hangingPunct="1"/>
             <a:fld id="{A9E6F060-20EB-3246-9088-08BF5F1271DE}" type="datetime1">
               <a:rPr lang="en-US" smtClean="0"/>
-              <a:t>10/14/2025</a:t>
+              <a:t>10/21/2025</a:t>
             </a:fld>
             <a:endParaRPr lang="en-US" dirty="0"/>
           </a:p>
@@ -4841,7 +4481,7 @@
             <a:pPr eaLnBrk="1" latinLnBrk="0" hangingPunct="1"/>
             <a:fld id="{7312819A-A7E0-496A-9C6B-0FBBF375D97B}" type="datetime1">
               <a:rPr lang="en-US" smtClean="0"/>
-              <a:t>10/14/2025</a:t>
+              <a:t>10/21/2025</a:t>
             </a:fld>
             <a:endParaRPr lang="en-US"/>
           </a:p>
@@ -5144,7 +4784,7 @@
             <a:pPr eaLnBrk="1" latinLnBrk="0" hangingPunct="1"/>
             <a:fld id="{932F6112-2530-4960-AA07-04E672D1E722}" type="datetime1">
               <a:rPr lang="en-US" smtClean="0"/>
-              <a:t>10/14/2025</a:t>
+              <a:t>10/21/2025</a:t>
             </a:fld>
             <a:endParaRPr lang="en-US"/>
           </a:p>
@@ -5325,7 +4965,7 @@
             <a:pPr eaLnBrk="1" latinLnBrk="0" hangingPunct="1"/>
             <a:fld id="{896A6EFF-8172-426D-9AC7-B0DD95EEE533}" type="datetime1">
               <a:rPr lang="en-US" smtClean="0"/>
-              <a:t>10/14/2025</a:t>
+              <a:t>10/21/2025</a:t>
             </a:fld>
             <a:endParaRPr lang="en-US"/>
           </a:p>
@@ -5665,7 +5305,7 @@
             <a:pPr eaLnBrk="1" latinLnBrk="0" hangingPunct="1"/>
             <a:fld id="{34C82E41-DA7E-CA4C-823B-C759BEA16CE8}" type="datetime1">
               <a:rPr lang="en-US" smtClean="0"/>
-              <a:t>10/14/2025</a:t>
+              <a:t>10/21/2025</a:t>
             </a:fld>
             <a:endParaRPr lang="en-US" dirty="0"/>
           </a:p>
@@ -5886,7 +5526,7 @@
             <a:pPr eaLnBrk="1" latinLnBrk="0" hangingPunct="1"/>
             <a:fld id="{2500C8B0-EB1A-0A41-B839-C4B99CD2225A}" type="datetime1">
               <a:rPr lang="en-US" smtClean="0"/>
-              <a:t>10/14/2025</a:t>
+              <a:t>10/21/2025</a:t>
             </a:fld>
             <a:endParaRPr lang="en-US"/>
           </a:p>
@@ -6239,7 +5879,7 @@
             <a:pPr eaLnBrk="1" latinLnBrk="0" hangingPunct="1"/>
             <a:fld id="{4F16605B-D952-1149-A111-28A5633BAE48}" type="datetime1">
               <a:rPr lang="en-US" smtClean="0"/>
-              <a:t>10/14/2025</a:t>
+              <a:t>10/21/2025</a:t>
             </a:fld>
             <a:endParaRPr lang="en-US"/>
           </a:p>
@@ -6472,7 +6112,7 @@
             <a:pPr eaLnBrk="1" latinLnBrk="0" hangingPunct="1"/>
             <a:fld id="{91109A1C-29B2-B04E-8365-C9D22C4AE842}" type="datetime1">
               <a:rPr lang="en-US" smtClean="0"/>
-              <a:t>10/14/2025</a:t>
+              <a:t>10/21/2025</a:t>
             </a:fld>
             <a:endParaRPr lang="en-US"/>
           </a:p>
@@ -6614,7 +6254,7 @@
             <a:pPr eaLnBrk="1" latinLnBrk="0" hangingPunct="1"/>
             <a:fld id="{2CE417B6-A42B-064A-8677-46C55C4F613A}" type="datetime1">
               <a:rPr lang="en-US" smtClean="0"/>
-              <a:t>10/14/2025</a:t>
+              <a:t>10/21/2025</a:t>
             </a:fld>
             <a:endParaRPr lang="en-US"/>
           </a:p>
@@ -6892,7 +6532,7 @@
             <a:pPr eaLnBrk="1" latinLnBrk="0" hangingPunct="1"/>
             <a:fld id="{DE76F5AD-3F1F-7141-BC8A-012C5728BE2D}" type="datetime1">
               <a:rPr lang="en-US" smtClean="0"/>
-              <a:t>10/14/2025</a:t>
+              <a:t>10/21/2025</a:t>
             </a:fld>
             <a:endParaRPr lang="en-US"/>
           </a:p>
@@ -7300,7 +6940,7 @@
             <a:pPr eaLnBrk="1" latinLnBrk="0" hangingPunct="1"/>
             <a:fld id="{09FA12B8-739E-4D47-A14C-180C3BC10865}" type="datetime1">
               <a:rPr lang="en-US" smtClean="0"/>
-              <a:t>10/14/2025</a:t>
+              <a:t>10/21/2025</a:t>
             </a:fld>
             <a:endParaRPr lang="en-US"/>
           </a:p>
@@ -7638,7 +7278,7 @@
             <a:pPr eaLnBrk="1" latinLnBrk="0" hangingPunct="1"/>
             <a:fld id="{CDD18CD8-E404-844E-A4BD-DF69B8E5881E}" type="datetime1">
               <a:rPr lang="en-US" smtClean="0"/>
-              <a:t>10/14/2025</a:t>
+              <a:t>10/21/2025</a:t>
             </a:fld>
             <a:endParaRPr lang="en-US" sz="1400" dirty="0">
               <a:solidFill>
@@ -8317,7 +7957,7 @@
             <a:pPr eaLnBrk="1" latinLnBrk="0" hangingPunct="1"/>
             <a:fld id="{0259BA2E-082A-4ACD-AA34-4B617DF5D259}" type="datetime1">
               <a:rPr lang="en-US" smtClean="0"/>
-              <a:t>10/14/2025</a:t>
+              <a:t>10/21/2025</a:t>
             </a:fld>
             <a:endParaRPr lang="en-US" sz="1050" dirty="0">
               <a:solidFill>
@@ -14069,6 +13709,146 @@
     <p:extLst>
       <p:ext uri="{BB962C8B-B14F-4D97-AF65-F5344CB8AC3E}">
         <p14:creationId xmlns:p14="http://schemas.microsoft.com/office/powerpoint/2010/main" val="931078930"/>
+      </p:ext>
+    </p:extLst>
+  </p:cSld>
+  <p:clrMapOvr>
+    <a:masterClrMapping/>
+  </p:clrMapOvr>
+</p:sld>
+</file>
+
+<file path=ppt/slides/slide6.xml><?xml version="1.0" encoding="utf-8"?>
+<p:sld xmlns:a="http://schemas.openxmlformats.org/drawingml/2006/main" xmlns:r="http://schemas.openxmlformats.org/officeDocument/2006/relationships" xmlns:p="http://schemas.openxmlformats.org/presentationml/2006/main">
+  <p:cSld>
+    <p:spTree>
+      <p:nvGrpSpPr>
+        <p:cNvPr id="1" name=""/>
+        <p:cNvGrpSpPr/>
+        <p:nvPr/>
+      </p:nvGrpSpPr>
+      <p:grpSpPr>
+        <a:xfrm>
+          <a:off x="0" y="0"/>
+          <a:ext cx="0" cy="0"/>
+          <a:chOff x="0" y="0"/>
+          <a:chExt cx="0" cy="0"/>
+        </a:xfrm>
+      </p:grpSpPr>
+      <p:sp>
+        <p:nvSpPr>
+          <p:cNvPr id="2" name="Title 1">
+            <a:extLst>
+              <a:ext uri="{FF2B5EF4-FFF2-40B4-BE49-F238E27FC236}">
+                <a16:creationId xmlns:a16="http://schemas.microsoft.com/office/drawing/2014/main" id="{27B89D51-1ADF-2FB6-0137-48B34ED702D2}"/>
+              </a:ext>
+            </a:extLst>
+          </p:cNvPr>
+          <p:cNvSpPr>
+            <a:spLocks noGrp="1"/>
+          </p:cNvSpPr>
+          <p:nvPr>
+            <p:ph type="title"/>
+          </p:nvPr>
+        </p:nvSpPr>
+        <p:spPr/>
+        <p:txBody>
+          <a:bodyPr/>
+          <a:lstStyle/>
+          <a:p>
+            <a:endParaRPr lang="en-US"/>
+          </a:p>
+        </p:txBody>
+      </p:sp>
+      <p:sp>
+        <p:nvSpPr>
+          <p:cNvPr id="3" name="Slide Number Placeholder 2">
+            <a:extLst>
+              <a:ext uri="{FF2B5EF4-FFF2-40B4-BE49-F238E27FC236}">
+                <a16:creationId xmlns:a16="http://schemas.microsoft.com/office/drawing/2014/main" id="{2F2DCAE3-76F5-E703-DC25-2834DEBAE0D9}"/>
+              </a:ext>
+            </a:extLst>
+          </p:cNvPr>
+          <p:cNvSpPr>
+            <a:spLocks noGrp="1"/>
+          </p:cNvSpPr>
+          <p:nvPr>
+            <p:ph type="sldNum" sz="quarter" idx="12"/>
+          </p:nvPr>
+        </p:nvSpPr>
+        <p:spPr/>
+        <p:txBody>
+          <a:bodyPr/>
+          <a:lstStyle/>
+          <a:p>
+            <a:fld id="{EA7C8D44-3667-46F6-9772-CC52308E2A7F}" type="slidenum">
+              <a:rPr kumimoji="0" lang="en-US" smtClean="0"/>
+              <a:pPr/>
+              <a:t>6</a:t>
+            </a:fld>
+            <a:endParaRPr kumimoji="0" lang="en-US" dirty="0"/>
+          </a:p>
+        </p:txBody>
+      </p:sp>
+      <p:sp>
+        <p:nvSpPr>
+          <p:cNvPr id="4" name="Content Placeholder 3">
+            <a:extLst>
+              <a:ext uri="{FF2B5EF4-FFF2-40B4-BE49-F238E27FC236}">
+                <a16:creationId xmlns:a16="http://schemas.microsoft.com/office/drawing/2014/main" id="{A3635D3B-61FA-D8DB-BAD2-D23E207E84EC}"/>
+              </a:ext>
+            </a:extLst>
+          </p:cNvPr>
+          <p:cNvSpPr>
+            <a:spLocks noGrp="1"/>
+          </p:cNvSpPr>
+          <p:nvPr>
+            <p:ph sz="quarter" idx="1"/>
+          </p:nvPr>
+        </p:nvSpPr>
+        <p:spPr/>
+        <p:txBody>
+          <a:bodyPr/>
+          <a:lstStyle/>
+          <a:p>
+            <a:endParaRPr lang="en-US"/>
+          </a:p>
+        </p:txBody>
+      </p:sp>
+      <p:pic>
+        <p:nvPicPr>
+          <p:cNvPr id="6" name="Picture 5">
+            <a:extLst>
+              <a:ext uri="{FF2B5EF4-FFF2-40B4-BE49-F238E27FC236}">
+                <a16:creationId xmlns:a16="http://schemas.microsoft.com/office/drawing/2014/main" id="{3E2493B5-D169-7537-3C49-9EF38B6F675E}"/>
+              </a:ext>
+            </a:extLst>
+          </p:cNvPr>
+          <p:cNvPicPr>
+            <a:picLocks noChangeAspect="1"/>
+          </p:cNvPicPr>
+          <p:nvPr/>
+        </p:nvPicPr>
+        <p:blipFill>
+          <a:blip r:embed="rId3"/>
+          <a:stretch>
+            <a:fillRect/>
+          </a:stretch>
+        </p:blipFill>
+        <p:spPr>
+          <a:xfrm>
+            <a:off x="1749115" y="0"/>
+            <a:ext cx="5645769" cy="6858000"/>
+          </a:xfrm>
+          <a:prstGeom prst="rect">
+            <a:avLst/>
+          </a:prstGeom>
+        </p:spPr>
+      </p:pic>
+    </p:spTree>
+    <p:extLst>
+      <p:ext uri="{BB962C8B-B14F-4D97-AF65-F5344CB8AC3E}">
+        <p14:creationId xmlns:p14="http://schemas.microsoft.com/office/powerpoint/2010/main" val="2981500173"/>
       </p:ext>
     </p:extLst>
   </p:cSld>

--- a/PPTs/Ch11_Interrupt_Timer_PWM Exercises ANS.pptx
+++ b/PPTs/Ch11_Interrupt_Timer_PWM Exercises ANS.pptx
@@ -6,10 +6,10 @@
     <p:sldMasterId id="2147483698" r:id="rId2"/>
   </p:sldMasterIdLst>
   <p:notesMasterIdLst>
-    <p:notesMasterId r:id="rId9"/>
+    <p:notesMasterId r:id="rId10"/>
   </p:notesMasterIdLst>
   <p:handoutMasterIdLst>
-    <p:handoutMasterId r:id="rId10"/>
+    <p:handoutMasterId r:id="rId11"/>
   </p:handoutMasterIdLst>
   <p:sldIdLst>
     <p:sldId id="256" r:id="rId3"/>
@@ -17,7 +17,8 @@
     <p:sldId id="317" r:id="rId5"/>
     <p:sldId id="314" r:id="rId6"/>
     <p:sldId id="315" r:id="rId7"/>
-    <p:sldId id="318" r:id="rId8"/>
+    <p:sldId id="319" r:id="rId8"/>
+    <p:sldId id="320" r:id="rId9"/>
   </p:sldIdLst>
   <p:sldSz cx="9144000" cy="6858000" type="screen4x3"/>
   <p:notesSz cx="7023100" cy="9309100"/>
@@ -138,7 +139,7 @@
 <file path=ppt/revisionInfo.xml><?xml version="1.0" encoding="utf-8"?>
 <p1510:revInfo xmlns:a="http://schemas.openxmlformats.org/drawingml/2006/main" xmlns:r="http://schemas.openxmlformats.org/officeDocument/2006/relationships" xmlns:p1510="http://schemas.microsoft.com/office/powerpoint/2015/10/main">
   <p1510:revLst>
-    <p1510:client id="{FE005790-576D-450D-9301-7DB63049DAAC}" v="14" dt="2025-10-21T21:45:12.047"/>
+    <p1510:client id="{FE005790-576D-450D-9301-7DB63049DAAC}" v="72" dt="2025-10-23T21:03:25.414"/>
   </p1510:revLst>
 </p1510:revInfo>
 </file>
@@ -148,7 +149,7 @@
   <pc:docChgLst>
     <pc:chgData name="Zonghua Gu" userId="9a7e1853e1951ef5" providerId="LiveId" clId="{CF1FAA12-072C-4ED5-BA76-0FFFAEFDB88A}"/>
     <pc:docChg chg="undo redo custSel addSld delSld modSld sldOrd delMainMaster">
-      <pc:chgData name="Zonghua Gu" userId="9a7e1853e1951ef5" providerId="LiveId" clId="{CF1FAA12-072C-4ED5-BA76-0FFFAEFDB88A}" dt="2025-10-21T21:45:06.437" v="914" actId="22"/>
+      <pc:chgData name="Zonghua Gu" userId="9a7e1853e1951ef5" providerId="LiveId" clId="{CF1FAA12-072C-4ED5-BA76-0FFFAEFDB88A}" dt="2025-10-23T21:03:26.594" v="1198" actId="2696"/>
       <pc:docMkLst>
         <pc:docMk/>
       </pc:docMkLst>
@@ -164,22 +165,6 @@
             <pc:docMk/>
             <pc:sldMk cId="1227639730" sldId="256"/>
             <ac:spMk id="5" creationId="{00000000-0000-0000-0000-000000000000}"/>
-          </ac:spMkLst>
-        </pc:spChg>
-        <pc:spChg chg="mod">
-          <ac:chgData name="Zonghua Gu" userId="9a7e1853e1951ef5" providerId="LiveId" clId="{CF1FAA12-072C-4ED5-BA76-0FFFAEFDB88A}" dt="2025-09-22T21:27:29.749" v="0"/>
-          <ac:spMkLst>
-            <pc:docMk/>
-            <pc:sldMk cId="1227639730" sldId="256"/>
-            <ac:spMk id="6" creationId="{00000000-0000-0000-0000-000000000000}"/>
-          </ac:spMkLst>
-        </pc:spChg>
-        <pc:spChg chg="mod">
-          <ac:chgData name="Zonghua Gu" userId="9a7e1853e1951ef5" providerId="LiveId" clId="{CF1FAA12-072C-4ED5-BA76-0FFFAEFDB88A}" dt="2025-09-22T21:27:58.775" v="20" actId="1076"/>
-          <ac:spMkLst>
-            <pc:docMk/>
-            <pc:sldMk cId="1227639730" sldId="256"/>
-            <ac:spMk id="13" creationId="{273EC5B2-C191-2980-14D0-C87219AED9C5}"/>
           </ac:spMkLst>
         </pc:spChg>
       </pc:sldChg>
@@ -219,6 +204,29 @@
             <pc:docMk/>
             <pc:sldMk cId="380073498" sldId="314"/>
             <ac:spMk id="23" creationId="{00000000-0000-0000-0000-000000000000}"/>
+          </ac:spMkLst>
+        </pc:spChg>
+      </pc:sldChg>
+      <pc:sldChg chg="modSp mod">
+        <pc:chgData name="Zonghua Gu" userId="9a7e1853e1951ef5" providerId="LiveId" clId="{CF1FAA12-072C-4ED5-BA76-0FFFAEFDB88A}" dt="2025-10-23T20:43:48.424" v="1044" actId="20577"/>
+        <pc:sldMkLst>
+          <pc:docMk/>
+          <pc:sldMk cId="931078930" sldId="315"/>
+        </pc:sldMkLst>
+        <pc:spChg chg="mod">
+          <ac:chgData name="Zonghua Gu" userId="9a7e1853e1951ef5" providerId="LiveId" clId="{CF1FAA12-072C-4ED5-BA76-0FFFAEFDB88A}" dt="2025-10-23T20:35:03.583" v="950" actId="20577"/>
+          <ac:spMkLst>
+            <pc:docMk/>
+            <pc:sldMk cId="931078930" sldId="315"/>
+            <ac:spMk id="2" creationId="{0E0237FA-AF0B-A9D5-0143-7F7F740ED378}"/>
+          </ac:spMkLst>
+        </pc:spChg>
+        <pc:spChg chg="mod">
+          <ac:chgData name="Zonghua Gu" userId="9a7e1853e1951ef5" providerId="LiveId" clId="{CF1FAA12-072C-4ED5-BA76-0FFFAEFDB88A}" dt="2025-10-23T20:43:48.424" v="1044" actId="20577"/>
+          <ac:spMkLst>
+            <pc:docMk/>
+            <pc:sldMk cId="931078930" sldId="315"/>
+            <ac:spMk id="4" creationId="{93A465D7-A56D-2251-BB5D-10176AEAE2C1}"/>
           </ac:spMkLst>
         </pc:spChg>
       </pc:sldChg>
@@ -284,20 +292,74 @@
           </ac:graphicFrameMkLst>
         </pc:graphicFrameChg>
       </pc:sldChg>
-      <pc:sldChg chg="addSp new mod">
-        <pc:chgData name="Zonghua Gu" userId="9a7e1853e1951ef5" providerId="LiveId" clId="{CF1FAA12-072C-4ED5-BA76-0FFFAEFDB88A}" dt="2025-10-21T21:45:06.437" v="914" actId="22"/>
+      <pc:sldChg chg="addSp delSp modSp new del mod">
+        <pc:chgData name="Zonghua Gu" userId="9a7e1853e1951ef5" providerId="LiveId" clId="{CF1FAA12-072C-4ED5-BA76-0FFFAEFDB88A}" dt="2025-10-23T21:03:26.594" v="1198" actId="2696"/>
         <pc:sldMkLst>
           <pc:docMk/>
           <pc:sldMk cId="2981500173" sldId="318"/>
         </pc:sldMkLst>
-        <pc:picChg chg="add">
-          <ac:chgData name="Zonghua Gu" userId="9a7e1853e1951ef5" providerId="LiveId" clId="{CF1FAA12-072C-4ED5-BA76-0FFFAEFDB88A}" dt="2025-10-21T21:45:06.437" v="914" actId="22"/>
+        <pc:picChg chg="add mod">
+          <ac:chgData name="Zonghua Gu" userId="9a7e1853e1951ef5" providerId="LiveId" clId="{CF1FAA12-072C-4ED5-BA76-0FFFAEFDB88A}" dt="2025-10-23T21:03:25.414" v="1197"/>
+          <ac:picMkLst>
+            <pc:docMk/>
+            <pc:sldMk cId="2981500173" sldId="318"/>
+            <ac:picMk id="5" creationId="{3E2493B5-D169-7537-3C49-9EF38B6F675E}"/>
+          </ac:picMkLst>
+        </pc:picChg>
+        <pc:picChg chg="add del">
+          <ac:chgData name="Zonghua Gu" userId="9a7e1853e1951ef5" providerId="LiveId" clId="{CF1FAA12-072C-4ED5-BA76-0FFFAEFDB88A}" dt="2025-10-23T21:02:48.003" v="1196" actId="21"/>
           <ac:picMkLst>
             <pc:docMk/>
             <pc:sldMk cId="2981500173" sldId="318"/>
             <ac:picMk id="6" creationId="{3E2493B5-D169-7537-3C49-9EF38B6F675E}"/>
           </ac:picMkLst>
         </pc:picChg>
+      </pc:sldChg>
+      <pc:sldChg chg="modSp new mod">
+        <pc:chgData name="Zonghua Gu" userId="9a7e1853e1951ef5" providerId="LiveId" clId="{CF1FAA12-072C-4ED5-BA76-0FFFAEFDB88A}" dt="2025-10-23T20:35:18.397" v="964" actId="20577"/>
+        <pc:sldMkLst>
+          <pc:docMk/>
+          <pc:sldMk cId="3607974989" sldId="319"/>
+        </pc:sldMkLst>
+        <pc:spChg chg="mod">
+          <ac:chgData name="Zonghua Gu" userId="9a7e1853e1951ef5" providerId="LiveId" clId="{CF1FAA12-072C-4ED5-BA76-0FFFAEFDB88A}" dt="2025-10-23T20:35:07.091" v="955" actId="20577"/>
+          <ac:spMkLst>
+            <pc:docMk/>
+            <pc:sldMk cId="3607974989" sldId="319"/>
+            <ac:spMk id="2" creationId="{9B96E8A5-D01A-79C6-14A7-1FF65B5637BA}"/>
+          </ac:spMkLst>
+        </pc:spChg>
+        <pc:spChg chg="mod">
+          <ac:chgData name="Zonghua Gu" userId="9a7e1853e1951ef5" providerId="LiveId" clId="{CF1FAA12-072C-4ED5-BA76-0FFFAEFDB88A}" dt="2025-10-23T20:35:18.397" v="964" actId="20577"/>
+          <ac:spMkLst>
+            <pc:docMk/>
+            <pc:sldMk cId="3607974989" sldId="319"/>
+            <ac:spMk id="4" creationId="{BB049634-DC49-9DF2-9DEE-AB904ABCF786}"/>
+          </ac:spMkLst>
+        </pc:spChg>
+      </pc:sldChg>
+      <pc:sldChg chg="modSp new mod">
+        <pc:chgData name="Zonghua Gu" userId="9a7e1853e1951ef5" providerId="LiveId" clId="{CF1FAA12-072C-4ED5-BA76-0FFFAEFDB88A}" dt="2025-10-23T21:02:03.518" v="1195"/>
+        <pc:sldMkLst>
+          <pc:docMk/>
+          <pc:sldMk cId="3414502414" sldId="320"/>
+        </pc:sldMkLst>
+        <pc:spChg chg="mod">
+          <ac:chgData name="Zonghua Gu" userId="9a7e1853e1951ef5" providerId="LiveId" clId="{CF1FAA12-072C-4ED5-BA76-0FFFAEFDB88A}" dt="2025-10-23T20:35:37.255" v="976" actId="20577"/>
+          <ac:spMkLst>
+            <pc:docMk/>
+            <pc:sldMk cId="3414502414" sldId="320"/>
+            <ac:spMk id="2" creationId="{AD839476-B0A6-786E-4C09-FAF9C7A32F12}"/>
+          </ac:spMkLst>
+        </pc:spChg>
+        <pc:spChg chg="mod">
+          <ac:chgData name="Zonghua Gu" userId="9a7e1853e1951ef5" providerId="LiveId" clId="{CF1FAA12-072C-4ED5-BA76-0FFFAEFDB88A}" dt="2025-10-23T21:02:03.518" v="1195"/>
+          <ac:spMkLst>
+            <pc:docMk/>
+            <pc:sldMk cId="3414502414" sldId="320"/>
+            <ac:spMk id="4" creationId="{8691F9C2-52EA-94A0-4F55-CF24C8688B3A}"/>
+          </ac:spMkLst>
+        </pc:spChg>
       </pc:sldChg>
     </pc:docChg>
   </pc:docChgLst>
@@ -387,7 +449,7 @@
             <a:fld id="{BD4F56A7-3CDE-194F-B9AF-D598FBBF1989}" type="datetimeFigureOut">
               <a:rPr lang="en-US" smtClean="0"/>
               <a:pPr/>
-              <a:t>10/21/2025</a:t>
+              <a:t>10/23/2025</a:t>
             </a:fld>
             <a:endParaRPr lang="en-US"/>
           </a:p>
@@ -555,7 +617,7 @@
             <a:fld id="{1E52AD58-60CE-E948-9CBA-0BD7030FC28E}" type="datetimeFigureOut">
               <a:rPr lang="en-US" smtClean="0"/>
               <a:pPr/>
-              <a:t>10/21/2025</a:t>
+              <a:t>10/23/2025</a:t>
             </a:fld>
             <a:endParaRPr lang="en-US"/>
           </a:p>
@@ -970,94 +1032,6 @@
 </p:notes>
 </file>
 
-<file path=ppt/notesSlides/notesSlide2.xml><?xml version="1.0" encoding="utf-8"?>
-<p:notes xmlns:a="http://schemas.openxmlformats.org/drawingml/2006/main" xmlns:r="http://schemas.openxmlformats.org/officeDocument/2006/relationships" xmlns:p="http://schemas.openxmlformats.org/presentationml/2006/main">
-  <p:cSld>
-    <p:spTree>
-      <p:nvGrpSpPr>
-        <p:cNvPr id="1" name=""/>
-        <p:cNvGrpSpPr/>
-        <p:nvPr/>
-      </p:nvGrpSpPr>
-      <p:grpSpPr>
-        <a:xfrm>
-          <a:off x="0" y="0"/>
-          <a:ext cx="0" cy="0"/>
-          <a:chOff x="0" y="0"/>
-          <a:chExt cx="0" cy="0"/>
-        </a:xfrm>
-      </p:grpSpPr>
-      <p:sp>
-        <p:nvSpPr>
-          <p:cNvPr id="2" name="Slide Image Placeholder 1"/>
-          <p:cNvSpPr>
-            <a:spLocks noGrp="1" noRot="1" noChangeAspect="1"/>
-          </p:cNvSpPr>
-          <p:nvPr>
-            <p:ph type="sldImg"/>
-          </p:nvPr>
-        </p:nvSpPr>
-        <p:spPr/>
-      </p:sp>
-      <p:sp>
-        <p:nvSpPr>
-          <p:cNvPr id="3" name="Notes Placeholder 2"/>
-          <p:cNvSpPr>
-            <a:spLocks noGrp="1"/>
-          </p:cNvSpPr>
-          <p:nvPr>
-            <p:ph type="body" idx="1"/>
-          </p:nvPr>
-        </p:nvSpPr>
-        <p:spPr/>
-        <p:txBody>
-          <a:bodyPr/>
-          <a:lstStyle/>
-          <a:p>
-            <a:r>
-              <a:rPr lang="en-US"/>
-              <a:t>https://www.youtube.com/watch?v=aEPzJrmACMw&amp;list=PLHv6klbVebn0pCLcmCxGVa7ZPx7CB01Rh&amp;index=4</a:t>
-            </a:r>
-          </a:p>
-        </p:txBody>
-      </p:sp>
-      <p:sp>
-        <p:nvSpPr>
-          <p:cNvPr id="4" name="Slide Number Placeholder 3"/>
-          <p:cNvSpPr>
-            <a:spLocks noGrp="1"/>
-          </p:cNvSpPr>
-          <p:nvPr>
-            <p:ph type="sldNum" sz="quarter" idx="5"/>
-          </p:nvPr>
-        </p:nvSpPr>
-        <p:spPr/>
-        <p:txBody>
-          <a:bodyPr/>
-          <a:lstStyle/>
-          <a:p>
-            <a:fld id="{D624DF53-3DD3-9F45-9E7E-472B96F1AB81}" type="slidenum">
-              <a:rPr lang="en-US" smtClean="0"/>
-              <a:pPr/>
-              <a:t>6</a:t>
-            </a:fld>
-            <a:endParaRPr lang="en-US"/>
-          </a:p>
-        </p:txBody>
-      </p:sp>
-    </p:spTree>
-    <p:extLst>
-      <p:ext uri="{BB962C8B-B14F-4D97-AF65-F5344CB8AC3E}">
-        <p14:creationId xmlns:p14="http://schemas.microsoft.com/office/powerpoint/2010/main" val="323097049"/>
-      </p:ext>
-    </p:extLst>
-  </p:cSld>
-  <p:clrMapOvr>
-    <a:masterClrMapping/>
-  </p:clrMapOvr>
-</p:notes>
-</file>
-
 <file path=ppt/slideLayouts/slideLayout1.xml><?xml version="1.0" encoding="utf-8"?>
 <p:sldLayout xmlns:a="http://schemas.openxmlformats.org/drawingml/2006/main" xmlns:r="http://schemas.openxmlformats.org/officeDocument/2006/relationships" xmlns:p="http://schemas.openxmlformats.org/presentationml/2006/main" showMasterSp="0" type="title" preserve="1">
   <p:cSld name="Title Slide">
@@ -1200,7 +1174,7 @@
             <a:pPr eaLnBrk="1" latinLnBrk="0" hangingPunct="1"/>
             <a:fld id="{8E8B2B42-CBC2-7D4E-BA50-0E7F29B4DAAB}" type="datetime1">
               <a:rPr lang="en-US" smtClean="0"/>
-              <a:t>10/21/2025</a:t>
+              <a:t>10/23/2025</a:t>
             </a:fld>
             <a:endParaRPr lang="en-US" sz="1600" dirty="0"/>
           </a:p>
@@ -1560,7 +1534,7 @@
             <a:pPr eaLnBrk="1" latinLnBrk="0" hangingPunct="1"/>
             <a:fld id="{597D1259-3A46-254C-ADDB-B5DA4F1DF3DA}" type="datetime1">
               <a:rPr lang="en-US" smtClean="0"/>
-              <a:t>10/21/2025</a:t>
+              <a:t>10/23/2025</a:t>
             </a:fld>
             <a:endParaRPr lang="en-US"/>
           </a:p>
@@ -1736,7 +1710,7 @@
             <a:pPr eaLnBrk="1" latinLnBrk="0" hangingPunct="1"/>
             <a:fld id="{CCA104EC-54AA-E04F-BDC0-22B4E8892699}" type="datetime1">
               <a:rPr lang="en-US" smtClean="0"/>
-              <a:t>10/21/2025</a:t>
+              <a:t>10/23/2025</a:t>
             </a:fld>
             <a:endParaRPr lang="en-US"/>
           </a:p>
@@ -2057,7 +2031,7 @@
             <a:pPr eaLnBrk="1" latinLnBrk="0" hangingPunct="1"/>
             <a:fld id="{3B6732A1-8A50-42D0-9FB5-A7CC4F887D83}" type="datetime1">
               <a:rPr lang="en-US" smtClean="0"/>
-              <a:t>10/21/2025</a:t>
+              <a:t>10/23/2025</a:t>
             </a:fld>
             <a:endParaRPr lang="en-US" sz="1200" dirty="0"/>
           </a:p>
@@ -2370,7 +2344,7 @@
             <a:pPr eaLnBrk="1" latinLnBrk="0" hangingPunct="1"/>
             <a:fld id="{44B809B3-6A2C-46CF-98AB-C7B45372B065}" type="datetime1">
               <a:rPr lang="en-US" smtClean="0"/>
-              <a:t>10/21/2025</a:t>
+              <a:t>10/23/2025</a:t>
             </a:fld>
             <a:endParaRPr lang="en-US" dirty="0"/>
           </a:p>
@@ -2645,7 +2619,7 @@
             <a:pPr eaLnBrk="1" latinLnBrk="0" hangingPunct="1"/>
             <a:fld id="{C191117F-3CD7-4767-AEE5-49A060274EAA}" type="datetime1">
               <a:rPr lang="en-US" smtClean="0"/>
-              <a:t>10/21/2025</a:t>
+              <a:t>10/23/2025</a:t>
             </a:fld>
             <a:endParaRPr lang="en-US" dirty="0"/>
           </a:p>
@@ -2871,7 +2845,7 @@
             <a:pPr eaLnBrk="1" latinLnBrk="0" hangingPunct="1"/>
             <a:fld id="{47B8C5CE-9DF7-4BB4-863A-6E277DDC03D4}" type="datetime1">
               <a:rPr lang="en-US" smtClean="0"/>
-              <a:t>10/21/2025</a:t>
+              <a:t>10/23/2025</a:t>
             </a:fld>
             <a:endParaRPr lang="en-US"/>
           </a:p>
@@ -3229,7 +3203,7 @@
             <a:pPr eaLnBrk="1" latinLnBrk="0" hangingPunct="1"/>
             <a:fld id="{5EE11402-9D83-40E7-9253-0548CE63EB94}" type="datetime1">
               <a:rPr lang="en-US" smtClean="0"/>
-              <a:t>10/21/2025</a:t>
+              <a:t>10/23/2025</a:t>
             </a:fld>
             <a:endParaRPr lang="en-US"/>
           </a:p>
@@ -3467,7 +3441,7 @@
             <a:pPr eaLnBrk="1" latinLnBrk="0" hangingPunct="1"/>
             <a:fld id="{0C0C8811-C7DA-4658-BB60-F635F9220CDF}" type="datetime1">
               <a:rPr lang="en-US" smtClean="0"/>
-              <a:t>10/21/2025</a:t>
+              <a:t>10/23/2025</a:t>
             </a:fld>
             <a:endParaRPr lang="en-US"/>
           </a:p>
@@ -3614,7 +3588,7 @@
             <a:pPr eaLnBrk="1" latinLnBrk="0" hangingPunct="1"/>
             <a:fld id="{2EB38FCF-5E28-44CB-A212-D3E75CA77D8D}" type="datetime1">
               <a:rPr lang="en-US" smtClean="0"/>
-              <a:t>10/21/2025</a:t>
+              <a:t>10/23/2025</a:t>
             </a:fld>
             <a:endParaRPr lang="en-US"/>
           </a:p>
@@ -3897,7 +3871,7 @@
             <a:pPr eaLnBrk="1" latinLnBrk="0" hangingPunct="1"/>
             <a:fld id="{755FE7C6-0DE5-4400-A2DD-37AB2CB98797}" type="datetime1">
               <a:rPr lang="en-US" smtClean="0"/>
-              <a:t>10/21/2025</a:t>
+              <a:t>10/23/2025</a:t>
             </a:fld>
             <a:endParaRPr lang="en-US"/>
           </a:p>
@@ -4195,7 +4169,7 @@
             <a:pPr eaLnBrk="1" latinLnBrk="0" hangingPunct="1"/>
             <a:fld id="{A9E6F060-20EB-3246-9088-08BF5F1271DE}" type="datetime1">
               <a:rPr lang="en-US" smtClean="0"/>
-              <a:t>10/21/2025</a:t>
+              <a:t>10/23/2025</a:t>
             </a:fld>
             <a:endParaRPr lang="en-US" dirty="0"/>
           </a:p>
@@ -4481,7 +4455,7 @@
             <a:pPr eaLnBrk="1" latinLnBrk="0" hangingPunct="1"/>
             <a:fld id="{7312819A-A7E0-496A-9C6B-0FBBF375D97B}" type="datetime1">
               <a:rPr lang="en-US" smtClean="0"/>
-              <a:t>10/21/2025</a:t>
+              <a:t>10/23/2025</a:t>
             </a:fld>
             <a:endParaRPr lang="en-US"/>
           </a:p>
@@ -4784,7 +4758,7 @@
             <a:pPr eaLnBrk="1" latinLnBrk="0" hangingPunct="1"/>
             <a:fld id="{932F6112-2530-4960-AA07-04E672D1E722}" type="datetime1">
               <a:rPr lang="en-US" smtClean="0"/>
-              <a:t>10/21/2025</a:t>
+              <a:t>10/23/2025</a:t>
             </a:fld>
             <a:endParaRPr lang="en-US"/>
           </a:p>
@@ -4965,7 +4939,7 @@
             <a:pPr eaLnBrk="1" latinLnBrk="0" hangingPunct="1"/>
             <a:fld id="{896A6EFF-8172-426D-9AC7-B0DD95EEE533}" type="datetime1">
               <a:rPr lang="en-US" smtClean="0"/>
-              <a:t>10/21/2025</a:t>
+              <a:t>10/23/2025</a:t>
             </a:fld>
             <a:endParaRPr lang="en-US"/>
           </a:p>
@@ -5305,7 +5279,7 @@
             <a:pPr eaLnBrk="1" latinLnBrk="0" hangingPunct="1"/>
             <a:fld id="{34C82E41-DA7E-CA4C-823B-C759BEA16CE8}" type="datetime1">
               <a:rPr lang="en-US" smtClean="0"/>
-              <a:t>10/21/2025</a:t>
+              <a:t>10/23/2025</a:t>
             </a:fld>
             <a:endParaRPr lang="en-US" dirty="0"/>
           </a:p>
@@ -5526,7 +5500,7 @@
             <a:pPr eaLnBrk="1" latinLnBrk="0" hangingPunct="1"/>
             <a:fld id="{2500C8B0-EB1A-0A41-B839-C4B99CD2225A}" type="datetime1">
               <a:rPr lang="en-US" smtClean="0"/>
-              <a:t>10/21/2025</a:t>
+              <a:t>10/23/2025</a:t>
             </a:fld>
             <a:endParaRPr lang="en-US"/>
           </a:p>
@@ -5879,7 +5853,7 @@
             <a:pPr eaLnBrk="1" latinLnBrk="0" hangingPunct="1"/>
             <a:fld id="{4F16605B-D952-1149-A111-28A5633BAE48}" type="datetime1">
               <a:rPr lang="en-US" smtClean="0"/>
-              <a:t>10/21/2025</a:t>
+              <a:t>10/23/2025</a:t>
             </a:fld>
             <a:endParaRPr lang="en-US"/>
           </a:p>
@@ -6112,7 +6086,7 @@
             <a:pPr eaLnBrk="1" latinLnBrk="0" hangingPunct="1"/>
             <a:fld id="{91109A1C-29B2-B04E-8365-C9D22C4AE842}" type="datetime1">
               <a:rPr lang="en-US" smtClean="0"/>
-              <a:t>10/21/2025</a:t>
+              <a:t>10/23/2025</a:t>
             </a:fld>
             <a:endParaRPr lang="en-US"/>
           </a:p>
@@ -6254,7 +6228,7 @@
             <a:pPr eaLnBrk="1" latinLnBrk="0" hangingPunct="1"/>
             <a:fld id="{2CE417B6-A42B-064A-8677-46C55C4F613A}" type="datetime1">
               <a:rPr lang="en-US" smtClean="0"/>
-              <a:t>10/21/2025</a:t>
+              <a:t>10/23/2025</a:t>
             </a:fld>
             <a:endParaRPr lang="en-US"/>
           </a:p>
@@ -6532,7 +6506,7 @@
             <a:pPr eaLnBrk="1" latinLnBrk="0" hangingPunct="1"/>
             <a:fld id="{DE76F5AD-3F1F-7141-BC8A-012C5728BE2D}" type="datetime1">
               <a:rPr lang="en-US" smtClean="0"/>
-              <a:t>10/21/2025</a:t>
+              <a:t>10/23/2025</a:t>
             </a:fld>
             <a:endParaRPr lang="en-US"/>
           </a:p>
@@ -6940,7 +6914,7 @@
             <a:pPr eaLnBrk="1" latinLnBrk="0" hangingPunct="1"/>
             <a:fld id="{09FA12B8-739E-4D47-A14C-180C3BC10865}" type="datetime1">
               <a:rPr lang="en-US" smtClean="0"/>
-              <a:t>10/21/2025</a:t>
+              <a:t>10/23/2025</a:t>
             </a:fld>
             <a:endParaRPr lang="en-US"/>
           </a:p>
@@ -7278,7 +7252,7 @@
             <a:pPr eaLnBrk="1" latinLnBrk="0" hangingPunct="1"/>
             <a:fld id="{CDD18CD8-E404-844E-A4BD-DF69B8E5881E}" type="datetime1">
               <a:rPr lang="en-US" smtClean="0"/>
-              <a:t>10/21/2025</a:t>
+              <a:t>10/23/2025</a:t>
             </a:fld>
             <a:endParaRPr lang="en-US" sz="1400" dirty="0">
               <a:solidFill>
@@ -7957,7 +7931,7 @@
             <a:pPr eaLnBrk="1" latinLnBrk="0" hangingPunct="1"/>
             <a:fld id="{0259BA2E-082A-4ACD-AA34-4B617DF5D259}" type="datetime1">
               <a:rPr lang="en-US" smtClean="0"/>
-              <a:t>10/21/2025</a:t>
+              <a:t>10/23/2025</a:t>
             </a:fld>
             <a:endParaRPr lang="en-US" sz="1050" dirty="0">
               <a:solidFill>
@@ -12806,12 +12780,8 @@
           <a:lstStyle/>
           <a:p>
             <a:r>
-              <a:rPr lang="en-US"/>
-              <a:t>Maximum </a:t>
-            </a:r>
-            <a:r>
               <a:rPr lang="en-US" dirty="0"/>
-              <a:t>timer counter value</a:t>
+              <a:t>Timer</a:t>
             </a:r>
           </a:p>
         </p:txBody>
@@ -12846,8 +12816,8 @@
           </a:p>
         </p:txBody>
       </p:sp>
-      <mc:AlternateContent xmlns:mc="http://schemas.openxmlformats.org/markup-compatibility/2006" xmlns:a14="http://schemas.microsoft.com/office/drawing/2010/main">
-        <mc:Choice Requires="a14">
+      <mc:AlternateContent xmlns:mc="http://schemas.openxmlformats.org/markup-compatibility/2006">
+        <mc:Choice xmlns:a14="http://schemas.microsoft.com/office/drawing/2010/main" Requires="a14">
           <p:sp>
             <p:nvSpPr>
               <p:cNvPr id="4" name="Content Placeholder 3">
@@ -12867,7 +12837,7 @@
             <p:spPr/>
             <p:txBody>
               <a:bodyPr>
-                <a:normAutofit fontScale="92500"/>
+                <a:normAutofit lnSpcReduction="10000"/>
               </a:bodyPr>
               <a:lstStyle/>
               <a:p>
@@ -12925,21 +12895,13 @@
                 </a14:m>
                 <a:r>
                   <a:rPr lang="en-US" dirty="0"/>
-                  <a:t> KHz, what is the maximum timer counter value?</a:t>
+                  <a:t> KHz, what is the maximum timer counter value (ARR)?</a:t>
                 </a:r>
               </a:p>
               <a:p>
                 <a:r>
                   <a:rPr lang="en-US" dirty="0"/>
-                  <a:t>ANS:  Timer clock </a:t>
-                </a:r>
-                <a:r>
-                  <a:rPr lang="en-US" dirty="0" err="1"/>
-                  <a:t>freuency</a:t>
-                </a:r>
-                <a:r>
-                  <a:rPr lang="en-US" dirty="0"/>
-                  <a:t> </a:t>
+                  <a:t>ANS:  Timer clock frequency </a:t>
                 </a:r>
                 <a14:m>
                   <m:oMath xmlns:m="http://schemas.openxmlformats.org/officeDocument/2006/math">
@@ -13294,48 +13256,14 @@
                           </m:e>
                           <m:sub>
                             <m:r>
-                              <a:rPr lang="en-US" i="1">
+                              <a:rPr lang="en-US" b="0" i="1" smtClean="0">
                                 <a:solidFill>
                                   <a:prstClr val="black"/>
                                 </a:solidFill>
-                                <a:latin typeface="Cambria Math"/>
+                                <a:latin typeface="Cambria Math" panose="02040503050406030204" pitchFamily="18" charset="0"/>
                               </a:rPr>
-                              <m:t>𝐶</m:t>
+                              <m:t>𝑇𝑖𝑚𝑒𝑟</m:t>
                             </m:r>
-                            <m:sSub>
-                              <m:sSubPr>
-                                <m:ctrlPr>
-                                  <a:rPr lang="en-US" i="1">
-                                    <a:solidFill>
-                                      <a:prstClr val="black"/>
-                                    </a:solidFill>
-                                    <a:latin typeface="Cambria Math" panose="02040503050406030204" pitchFamily="18" charset="0"/>
-                                  </a:rPr>
-                                </m:ctrlPr>
-                              </m:sSubPr>
-                              <m:e>
-                                <m:r>
-                                  <a:rPr lang="en-US" i="1">
-                                    <a:solidFill>
-                                      <a:prstClr val="black"/>
-                                    </a:solidFill>
-                                    <a:latin typeface="Cambria Math"/>
-                                  </a:rPr>
-                                  <m:t>𝐾</m:t>
-                                </m:r>
-                              </m:e>
-                              <m:sub>
-                                <m:r>
-                                  <a:rPr lang="en-US" i="1">
-                                    <a:solidFill>
-                                      <a:prstClr val="black"/>
-                                    </a:solidFill>
-                                    <a:latin typeface="Cambria Math"/>
-                                  </a:rPr>
-                                  <m:t>𝐶𝑁𝑇</m:t>
-                                </m:r>
-                              </m:sub>
-                            </m:sSub>
                           </m:sub>
                         </m:sSub>
                       </m:den>
@@ -13398,24 +13326,7 @@
               <a:p>
                 <a:r>
                   <a:rPr lang="en-US" dirty="0"/>
-                  <a:t>If timer clock frequency is </a:t>
-                </a:r>
-                <a14:m>
-                  <m:oMath xmlns:m="http://schemas.openxmlformats.org/officeDocument/2006/math">
-                    <m:r>
-                      <a:rPr lang="en-US" i="1">
-                        <a:solidFill>
-                          <a:prstClr val="black"/>
-                        </a:solidFill>
-                        <a:latin typeface="Cambria Math" panose="02040503050406030204" pitchFamily="18" charset="0"/>
-                      </a:rPr>
-                      <m:t>24</m:t>
-                    </m:r>
-                  </m:oMath>
-                </a14:m>
-                <a:r>
-                  <a:rPr lang="en-US" dirty="0"/>
-                  <a:t> MHz,  timer interrupt frequency is </a:t>
+                  <a:t>Redo the problem for timer interrupt frequency of </a:t>
                 </a:r>
                 <a14:m>
                   <m:oMath xmlns:m="http://schemas.openxmlformats.org/officeDocument/2006/math">
@@ -13432,7 +13343,7 @@
                 </a14:m>
                 <a:r>
                   <a:rPr lang="en-US" dirty="0"/>
-                  <a:t> Hz, what is the maximum timer counter value?</a:t>
+                  <a:t> Hz.</a:t>
                 </a:r>
               </a:p>
               <a:p>
@@ -13554,48 +13465,14 @@
                           </m:e>
                           <m:sub>
                             <m:r>
-                              <a:rPr lang="en-US" i="1">
+                              <a:rPr lang="en-US" b="0" i="1" smtClean="0">
                                 <a:solidFill>
                                   <a:prstClr val="black"/>
                                 </a:solidFill>
-                                <a:latin typeface="Cambria Math"/>
+                                <a:latin typeface="Cambria Math" panose="02040503050406030204" pitchFamily="18" charset="0"/>
                               </a:rPr>
-                              <m:t>𝐶</m:t>
+                              <m:t>𝑇𝑖𝑚𝑒𝑟</m:t>
                             </m:r>
-                            <m:sSub>
-                              <m:sSubPr>
-                                <m:ctrlPr>
-                                  <a:rPr lang="en-US" i="1">
-                                    <a:solidFill>
-                                      <a:prstClr val="black"/>
-                                    </a:solidFill>
-                                    <a:latin typeface="Cambria Math" panose="02040503050406030204" pitchFamily="18" charset="0"/>
-                                  </a:rPr>
-                                </m:ctrlPr>
-                              </m:sSubPr>
-                              <m:e>
-                                <m:r>
-                                  <a:rPr lang="en-US" i="1">
-                                    <a:solidFill>
-                                      <a:prstClr val="black"/>
-                                    </a:solidFill>
-                                    <a:latin typeface="Cambria Math"/>
-                                  </a:rPr>
-                                  <m:t>𝐾</m:t>
-                                </m:r>
-                              </m:e>
-                              <m:sub>
-                                <m:r>
-                                  <a:rPr lang="en-US" i="1">
-                                    <a:solidFill>
-                                      <a:prstClr val="black"/>
-                                    </a:solidFill>
-                                    <a:latin typeface="Cambria Math"/>
-                                  </a:rPr>
-                                  <m:t>𝐶𝑁𝑇</m:t>
-                                </m:r>
-                              </m:sub>
-                            </m:sSub>
                           </m:sub>
                         </m:sSub>
                       </m:den>
@@ -13665,7 +13542,7 @@
             </p:txBody>
           </p:sp>
         </mc:Choice>
-        <mc:Fallback xmlns="">
+        <mc:Fallback>
           <p:sp>
             <p:nvSpPr>
               <p:cNvPr id="4" name="Content Placeholder 3">
@@ -13686,7 +13563,7 @@
               <a:blipFill>
                 <a:blip r:embed="rId2"/>
                 <a:stretch>
-                  <a:fillRect l="-519" t="-988" r="-667"/>
+                  <a:fillRect l="-667" t="-1852"/>
                 </a:stretch>
               </a:blipFill>
             </p:spPr>
@@ -13740,7 +13617,7 @@
           <p:cNvPr id="2" name="Title 1">
             <a:extLst>
               <a:ext uri="{FF2B5EF4-FFF2-40B4-BE49-F238E27FC236}">
-                <a16:creationId xmlns:a16="http://schemas.microsoft.com/office/drawing/2014/main" id="{27B89D51-1ADF-2FB6-0137-48B34ED702D2}"/>
+                <a16:creationId xmlns:a16="http://schemas.microsoft.com/office/drawing/2014/main" id="{9B96E8A5-D01A-79C6-14A7-1FF65B5637BA}"/>
               </a:ext>
             </a:extLst>
           </p:cNvPr>
@@ -13756,7 +13633,10 @@
           <a:bodyPr/>
           <a:lstStyle/>
           <a:p>
-            <a:endParaRPr lang="en-US"/>
+            <a:r>
+              <a:rPr lang="en-US" dirty="0"/>
+              <a:t>Timer</a:t>
+            </a:r>
           </a:p>
         </p:txBody>
       </p:sp>
@@ -13765,7 +13645,7 @@
           <p:cNvPr id="3" name="Slide Number Placeholder 2">
             <a:extLst>
               <a:ext uri="{FF2B5EF4-FFF2-40B4-BE49-F238E27FC236}">
-                <a16:creationId xmlns:a16="http://schemas.microsoft.com/office/drawing/2014/main" id="{2F2DCAE3-76F5-E703-DC25-2834DEBAE0D9}"/>
+                <a16:creationId xmlns:a16="http://schemas.microsoft.com/office/drawing/2014/main" id="{B0855034-F616-5ECE-ED45-698F11E71EAE}"/>
               </a:ext>
             </a:extLst>
           </p:cNvPr>
@@ -13795,7 +13675,7 @@
           <p:cNvPr id="4" name="Content Placeholder 3">
             <a:extLst>
               <a:ext uri="{FF2B5EF4-FFF2-40B4-BE49-F238E27FC236}">
-                <a16:creationId xmlns:a16="http://schemas.microsoft.com/office/drawing/2014/main" id="{A3635D3B-61FA-D8DB-BAD2-D23E207E84EC}"/>
+                <a16:creationId xmlns:a16="http://schemas.microsoft.com/office/drawing/2014/main" id="{BB049634-DC49-9DF2-9DEE-AB904ABCF786}"/>
               </a:ext>
             </a:extLst>
           </p:cNvPr>
@@ -13811,44 +13691,238 @@
           <a:bodyPr/>
           <a:lstStyle/>
           <a:p>
-            <a:endParaRPr lang="en-US"/>
-          </a:p>
-        </p:txBody>
-      </p:sp>
-      <p:pic>
-        <p:nvPicPr>
-          <p:cNvPr id="6" name="Picture 5">
+            <a:r>
+              <a:rPr lang="en-US" dirty="0"/>
+              <a:t>a) What value should you use for ARR to get a </a:t>
+            </a:r>
+            <a:r>
+              <a:rPr lang="en-US" dirty="0" err="1"/>
+              <a:t>SysTick</a:t>
+            </a:r>
+            <a:r>
+              <a:rPr lang="en-US" dirty="0"/>
+              <a:t> timer interrupt every 70ms on a processor LP1768? (6 points)</a:t>
+            </a:r>
+          </a:p>
+          <a:p>
+            <a:endParaRPr lang="en-US" dirty="0"/>
+          </a:p>
+          <a:p>
+            <a:r>
+              <a:rPr lang="en-US" dirty="0"/>
+              <a:t>b) If you used the same value for ARR from part (a) but ran that code on a newer microcontroller featuring a 500 MHz Cortex M4 processor, how often would </a:t>
+            </a:r>
+            <a:r>
+              <a:rPr lang="en-US" dirty="0" err="1"/>
+              <a:t>SysTick</a:t>
+            </a:r>
+            <a:r>
+              <a:rPr lang="en-US" dirty="0"/>
+              <a:t> interrupts occur? (4 points)</a:t>
+            </a:r>
+          </a:p>
+        </p:txBody>
+      </p:sp>
+    </p:spTree>
+    <p:extLst>
+      <p:ext uri="{BB962C8B-B14F-4D97-AF65-F5344CB8AC3E}">
+        <p14:creationId xmlns:p14="http://schemas.microsoft.com/office/powerpoint/2010/main" val="3607974989"/>
+      </p:ext>
+    </p:extLst>
+  </p:cSld>
+  <p:clrMapOvr>
+    <a:masterClrMapping/>
+  </p:clrMapOvr>
+</p:sld>
+</file>
+
+<file path=ppt/slides/slide7.xml><?xml version="1.0" encoding="utf-8"?>
+<p:sld xmlns:a="http://schemas.openxmlformats.org/drawingml/2006/main" xmlns:r="http://schemas.openxmlformats.org/officeDocument/2006/relationships" xmlns:p="http://schemas.openxmlformats.org/presentationml/2006/main">
+  <p:cSld>
+    <p:spTree>
+      <p:nvGrpSpPr>
+        <p:cNvPr id="1" name=""/>
+        <p:cNvGrpSpPr/>
+        <p:nvPr/>
+      </p:nvGrpSpPr>
+      <p:grpSpPr>
+        <a:xfrm>
+          <a:off x="0" y="0"/>
+          <a:ext cx="0" cy="0"/>
+          <a:chOff x="0" y="0"/>
+          <a:chExt cx="0" cy="0"/>
+        </a:xfrm>
+      </p:grpSpPr>
+      <p:sp>
+        <p:nvSpPr>
+          <p:cNvPr id="2" name="Title 1">
             <a:extLst>
               <a:ext uri="{FF2B5EF4-FFF2-40B4-BE49-F238E27FC236}">
-                <a16:creationId xmlns:a16="http://schemas.microsoft.com/office/drawing/2014/main" id="{3E2493B5-D169-7537-3C49-9EF38B6F675E}"/>
+                <a16:creationId xmlns:a16="http://schemas.microsoft.com/office/drawing/2014/main" id="{AD839476-B0A6-786E-4C09-FAF9C7A32F12}"/>
               </a:ext>
             </a:extLst>
           </p:cNvPr>
-          <p:cNvPicPr>
-            <a:picLocks noChangeAspect="1"/>
-          </p:cNvPicPr>
-          <p:nvPr/>
-        </p:nvPicPr>
-        <p:blipFill>
-          <a:blip r:embed="rId3"/>
-          <a:stretch>
-            <a:fillRect/>
-          </a:stretch>
-        </p:blipFill>
-        <p:spPr>
-          <a:xfrm>
-            <a:off x="1749115" y="0"/>
-            <a:ext cx="5645769" cy="6858000"/>
-          </a:xfrm>
-          <a:prstGeom prst="rect">
-            <a:avLst/>
-          </a:prstGeom>
-        </p:spPr>
-      </p:pic>
+          <p:cNvSpPr>
+            <a:spLocks noGrp="1"/>
+          </p:cNvSpPr>
+          <p:nvPr>
+            <p:ph type="title"/>
+          </p:nvPr>
+        </p:nvSpPr>
+        <p:spPr/>
+        <p:txBody>
+          <a:bodyPr/>
+          <a:lstStyle/>
+          <a:p>
+            <a:r>
+              <a:rPr lang="en-US" dirty="0"/>
+              <a:t>Timer ANS</a:t>
+            </a:r>
+          </a:p>
+        </p:txBody>
+      </p:sp>
+      <p:sp>
+        <p:nvSpPr>
+          <p:cNvPr id="3" name="Slide Number Placeholder 2">
+            <a:extLst>
+              <a:ext uri="{FF2B5EF4-FFF2-40B4-BE49-F238E27FC236}">
+                <a16:creationId xmlns:a16="http://schemas.microsoft.com/office/drawing/2014/main" id="{45CE82D7-5259-D28B-CB38-9D7C3A50DC71}"/>
+              </a:ext>
+            </a:extLst>
+          </p:cNvPr>
+          <p:cNvSpPr>
+            <a:spLocks noGrp="1"/>
+          </p:cNvSpPr>
+          <p:nvPr>
+            <p:ph type="sldNum" sz="quarter" idx="12"/>
+          </p:nvPr>
+        </p:nvSpPr>
+        <p:spPr/>
+        <p:txBody>
+          <a:bodyPr/>
+          <a:lstStyle/>
+          <a:p>
+            <a:fld id="{EA7C8D44-3667-46F6-9772-CC52308E2A7F}" type="slidenum">
+              <a:rPr kumimoji="0" lang="en-US" smtClean="0"/>
+              <a:pPr/>
+              <a:t>7</a:t>
+            </a:fld>
+            <a:endParaRPr kumimoji="0" lang="en-US" dirty="0"/>
+          </a:p>
+        </p:txBody>
+      </p:sp>
+      <p:sp>
+        <p:nvSpPr>
+          <p:cNvPr id="4" name="Content Placeholder 3">
+            <a:extLst>
+              <a:ext uri="{FF2B5EF4-FFF2-40B4-BE49-F238E27FC236}">
+                <a16:creationId xmlns:a16="http://schemas.microsoft.com/office/drawing/2014/main" id="{8691F9C2-52EA-94A0-4F55-CF24C8688B3A}"/>
+              </a:ext>
+            </a:extLst>
+          </p:cNvPr>
+          <p:cNvSpPr>
+            <a:spLocks noGrp="1"/>
+          </p:cNvSpPr>
+          <p:nvPr>
+            <p:ph sz="quarter" idx="1"/>
+          </p:nvPr>
+        </p:nvSpPr>
+        <p:spPr/>
+        <p:txBody>
+          <a:bodyPr>
+            <a:normAutofit/>
+          </a:bodyPr>
+          <a:lstStyle/>
+          <a:p>
+            <a:r>
+              <a:rPr lang="en-US" dirty="0"/>
+              <a:t>Q.  What value should you use for ARR to get a timer interrupt every 70ms on a processor with CPU frequency of 100 MHz (no </a:t>
+            </a:r>
+            <a:r>
+              <a:rPr lang="en-US" dirty="0" err="1"/>
+              <a:t>prescaler</a:t>
+            </a:r>
+            <a:r>
+              <a:rPr lang="en-US" dirty="0"/>
+              <a:t>)?</a:t>
+            </a:r>
+          </a:p>
+          <a:p>
+            <a:r>
+              <a:rPr lang="en-US" dirty="0"/>
+              <a:t>ANS: Timer period is determined by the formula: T = (ARR + 1) / </a:t>
+            </a:r>
+            <a:r>
+              <a:rPr lang="en-US" dirty="0" err="1"/>
+              <a:t>CPU_frequency</a:t>
+            </a:r>
+            <a:r>
+              <a:rPr lang="en-US" dirty="0"/>
+              <a:t> (no </a:t>
+            </a:r>
+            <a:r>
+              <a:rPr lang="en-US" dirty="0" err="1"/>
+              <a:t>prescaler</a:t>
+            </a:r>
+            <a:r>
+              <a:rPr lang="en-US" dirty="0"/>
+              <a:t>)</a:t>
+            </a:r>
+          </a:p>
+          <a:p>
+            <a:pPr lvl="1"/>
+            <a:r>
+              <a:rPr lang="en-US" dirty="0"/>
+              <a:t>ARR = (T * </a:t>
+            </a:r>
+            <a:r>
+              <a:rPr lang="en-US" dirty="0" err="1"/>
+              <a:t>CPU_frequency</a:t>
+            </a:r>
+            <a:r>
+              <a:rPr lang="en-US" dirty="0"/>
+              <a:t>) – 1 = (70 * 10</a:t>
+            </a:r>
+            <a:r>
+              <a:rPr lang="en-US" baseline="30000" dirty="0"/>
+              <a:t>-3</a:t>
+            </a:r>
+            <a:r>
+              <a:rPr lang="en-US" dirty="0"/>
+              <a:t> s) * (100 * 10</a:t>
+            </a:r>
+            <a:r>
+              <a:rPr lang="en-US" baseline="30000" dirty="0"/>
+              <a:t>6</a:t>
+            </a:r>
+            <a:r>
+              <a:rPr lang="en-US" dirty="0"/>
+              <a:t> cycles/s) - 1 = 6,999,999.</a:t>
+            </a:r>
+          </a:p>
+          <a:p>
+            <a:r>
+              <a:rPr lang="en-US" dirty="0"/>
+              <a:t>Q. What is the timer period, if you used the same ARR value on a 500 MHz processor?</a:t>
+            </a:r>
+          </a:p>
+          <a:p>
+            <a:r>
+              <a:rPr lang="en-US" dirty="0"/>
+              <a:t>ANS:  T = (6,999,999 + 1) / (500 * 10^6 cycles/s) = 0.014 s = 14 </a:t>
+            </a:r>
+            <a:r>
+              <a:rPr lang="en-US" dirty="0" err="1"/>
+              <a:t>ms</a:t>
+            </a:r>
+            <a:endParaRPr lang="en-US" dirty="0"/>
+          </a:p>
+        </p:txBody>
+      </p:sp>
     </p:spTree>
     <p:extLst>
       <p:ext uri="{BB962C8B-B14F-4D97-AF65-F5344CB8AC3E}">
-        <p14:creationId xmlns:p14="http://schemas.microsoft.com/office/powerpoint/2010/main" val="2981500173"/>
+        <p14:creationId xmlns:p14="http://schemas.microsoft.com/office/powerpoint/2010/main" val="3414502414"/>
       </p:ext>
     </p:extLst>
   </p:cSld>
